--- a/docs/pptx/entire/ritu-entire-linsubhr-disc-anemia2.pptx
+++ b/docs/pptx/entire/ritu-entire-linsubhr-disc-anemia2.pptx
@@ -3045,612 +3045,612 @@
           </p:nvSpPr>
           <p:spPr>
             <a:xfrm>
-              <a:off x="1172049" y="3846010"/>
-              <a:ext cx="7090630" cy="1128649"/>
+              <a:off x="1172049" y="3853748"/>
+              <a:ext cx="7090630" cy="1119622"/>
             </a:xfrm>
             <a:custGeom>
               <a:avLst/>
               <a:pathLst>
-                <a:path w="7090630" h="1128649">
+                <a:path w="7090630" h="1119622">
                   <a:moveTo>
                     <a:pt x="0" y="0"/>
                   </a:moveTo>
                   <a:lnTo>
-                    <a:pt x="71622" y="18523"/>
-                  </a:lnTo>
-                  <a:lnTo>
-                    <a:pt x="143245" y="36846"/>
-                  </a:lnTo>
-                  <a:lnTo>
-                    <a:pt x="214867" y="54971"/>
-                  </a:lnTo>
-                  <a:lnTo>
-                    <a:pt x="286490" y="72900"/>
-                  </a:lnTo>
-                  <a:lnTo>
-                    <a:pt x="358112" y="90634"/>
-                  </a:lnTo>
-                  <a:lnTo>
-                    <a:pt x="429735" y="108177"/>
-                  </a:lnTo>
-                  <a:lnTo>
-                    <a:pt x="501357" y="125530"/>
-                  </a:lnTo>
-                  <a:lnTo>
-                    <a:pt x="572980" y="142695"/>
-                  </a:lnTo>
-                  <a:lnTo>
-                    <a:pt x="644602" y="159674"/>
-                  </a:lnTo>
-                  <a:lnTo>
-                    <a:pt x="716225" y="176469"/>
-                  </a:lnTo>
-                  <a:lnTo>
-                    <a:pt x="787847" y="193082"/>
-                  </a:lnTo>
-                  <a:lnTo>
-                    <a:pt x="859470" y="209516"/>
-                  </a:lnTo>
-                  <a:lnTo>
-                    <a:pt x="931092" y="225772"/>
-                  </a:lnTo>
-                  <a:lnTo>
-                    <a:pt x="1002715" y="241852"/>
-                  </a:lnTo>
-                  <a:lnTo>
-                    <a:pt x="1074337" y="257757"/>
-                  </a:lnTo>
-                  <a:lnTo>
-                    <a:pt x="1145960" y="273491"/>
-                  </a:lnTo>
-                  <a:lnTo>
-                    <a:pt x="1217582" y="289054"/>
-                  </a:lnTo>
-                  <a:lnTo>
-                    <a:pt x="1289205" y="304449"/>
-                  </a:lnTo>
-                  <a:lnTo>
-                    <a:pt x="1360827" y="319677"/>
-                  </a:lnTo>
-                  <a:lnTo>
-                    <a:pt x="1432450" y="334740"/>
-                  </a:lnTo>
-                  <a:lnTo>
-                    <a:pt x="1504073" y="349640"/>
-                  </a:lnTo>
-                  <a:lnTo>
-                    <a:pt x="1575695" y="364379"/>
-                  </a:lnTo>
-                  <a:lnTo>
-                    <a:pt x="1647318" y="378959"/>
-                  </a:lnTo>
-                  <a:lnTo>
-                    <a:pt x="1718940" y="393380"/>
-                  </a:lnTo>
-                  <a:lnTo>
-                    <a:pt x="1790563" y="407646"/>
-                  </a:lnTo>
-                  <a:lnTo>
-                    <a:pt x="1862185" y="421757"/>
-                  </a:lnTo>
-                  <a:lnTo>
-                    <a:pt x="1933808" y="435715"/>
-                  </a:lnTo>
-                  <a:lnTo>
-                    <a:pt x="2005430" y="449522"/>
-                  </a:lnTo>
-                  <a:lnTo>
-                    <a:pt x="2077053" y="463180"/>
-                  </a:lnTo>
-                  <a:lnTo>
-                    <a:pt x="2148675" y="476690"/>
-                  </a:lnTo>
-                  <a:lnTo>
-                    <a:pt x="2220298" y="490054"/>
-                  </a:lnTo>
-                  <a:lnTo>
-                    <a:pt x="2291920" y="503273"/>
-                  </a:lnTo>
-                  <a:lnTo>
-                    <a:pt x="2363543" y="516349"/>
-                  </a:lnTo>
-                  <a:lnTo>
-                    <a:pt x="2435165" y="529283"/>
-                  </a:lnTo>
-                  <a:lnTo>
-                    <a:pt x="2506788" y="542077"/>
-                  </a:lnTo>
-                  <a:lnTo>
-                    <a:pt x="2578410" y="554733"/>
-                  </a:lnTo>
-                  <a:lnTo>
-                    <a:pt x="2650033" y="567252"/>
-                  </a:lnTo>
-                  <a:lnTo>
-                    <a:pt x="2721655" y="579635"/>
-                  </a:lnTo>
-                  <a:lnTo>
-                    <a:pt x="2793278" y="591885"/>
-                  </a:lnTo>
-                  <a:lnTo>
-                    <a:pt x="2864901" y="604001"/>
-                  </a:lnTo>
-                  <a:lnTo>
-                    <a:pt x="2936523" y="615987"/>
-                  </a:lnTo>
-                  <a:lnTo>
-                    <a:pt x="3008146" y="627843"/>
-                  </a:lnTo>
-                  <a:lnTo>
-                    <a:pt x="3079768" y="639570"/>
-                  </a:lnTo>
-                  <a:lnTo>
-                    <a:pt x="3151391" y="651171"/>
-                  </a:lnTo>
-                  <a:lnTo>
-                    <a:pt x="3223013" y="662646"/>
-                  </a:lnTo>
-                  <a:lnTo>
-                    <a:pt x="3294636" y="673996"/>
-                  </a:lnTo>
-                  <a:lnTo>
-                    <a:pt x="3366258" y="685224"/>
-                  </a:lnTo>
-                  <a:lnTo>
-                    <a:pt x="3437881" y="696331"/>
-                  </a:lnTo>
-                  <a:lnTo>
-                    <a:pt x="3509503" y="707317"/>
-                  </a:lnTo>
-                  <a:lnTo>
-                    <a:pt x="3581126" y="718184"/>
-                  </a:lnTo>
-                  <a:lnTo>
-                    <a:pt x="3652748" y="728933"/>
-                  </a:lnTo>
-                  <a:lnTo>
-                    <a:pt x="3724371" y="739567"/>
-                  </a:lnTo>
-                  <a:lnTo>
-                    <a:pt x="3795993" y="750085"/>
-                  </a:lnTo>
-                  <a:lnTo>
-                    <a:pt x="3867616" y="760489"/>
-                  </a:lnTo>
-                  <a:lnTo>
-                    <a:pt x="3939238" y="770780"/>
-                  </a:lnTo>
-                  <a:lnTo>
-                    <a:pt x="4010861" y="780961"/>
-                  </a:lnTo>
-                  <a:lnTo>
-                    <a:pt x="4082483" y="791031"/>
-                  </a:lnTo>
-                  <a:lnTo>
-                    <a:pt x="4154106" y="800992"/>
-                  </a:lnTo>
-                  <a:lnTo>
-                    <a:pt x="4225729" y="810845"/>
-                  </a:lnTo>
-                  <a:lnTo>
-                    <a:pt x="4297351" y="820591"/>
-                  </a:lnTo>
-                  <a:lnTo>
-                    <a:pt x="4368974" y="830232"/>
-                  </a:lnTo>
-                  <a:lnTo>
-                    <a:pt x="4440596" y="839769"/>
-                  </a:lnTo>
-                  <a:lnTo>
-                    <a:pt x="4512219" y="849202"/>
-                  </a:lnTo>
-                  <a:lnTo>
-                    <a:pt x="4583841" y="858534"/>
-                  </a:lnTo>
-                  <a:lnTo>
-                    <a:pt x="4655464" y="867764"/>
-                  </a:lnTo>
-                  <a:lnTo>
-                    <a:pt x="4727086" y="876894"/>
-                  </a:lnTo>
-                  <a:lnTo>
-                    <a:pt x="4798709" y="881831"/>
-                  </a:lnTo>
-                  <a:lnTo>
-                    <a:pt x="4870331" y="881952"/>
-                  </a:lnTo>
-                  <a:lnTo>
-                    <a:pt x="4941954" y="882074"/>
-                  </a:lnTo>
-                  <a:lnTo>
-                    <a:pt x="5013576" y="882195"/>
-                  </a:lnTo>
-                  <a:lnTo>
-                    <a:pt x="5085199" y="882316"/>
-                  </a:lnTo>
-                  <a:lnTo>
-                    <a:pt x="5156821" y="882438"/>
-                  </a:lnTo>
-                  <a:lnTo>
-                    <a:pt x="5228444" y="882559"/>
-                  </a:lnTo>
-                  <a:lnTo>
-                    <a:pt x="5300066" y="882680"/>
-                  </a:lnTo>
-                  <a:lnTo>
-                    <a:pt x="5371689" y="882802"/>
-                  </a:lnTo>
-                  <a:lnTo>
-                    <a:pt x="5443311" y="882923"/>
-                  </a:lnTo>
-                  <a:lnTo>
-                    <a:pt x="5514934" y="883044"/>
-                  </a:lnTo>
-                  <a:lnTo>
-                    <a:pt x="5586557" y="883165"/>
-                  </a:lnTo>
-                  <a:lnTo>
-                    <a:pt x="5658179" y="883286"/>
-                  </a:lnTo>
-                  <a:lnTo>
-                    <a:pt x="5729802" y="883408"/>
-                  </a:lnTo>
-                  <a:lnTo>
-                    <a:pt x="5801424" y="883529"/>
-                  </a:lnTo>
-                  <a:lnTo>
-                    <a:pt x="5873047" y="883650"/>
-                  </a:lnTo>
-                  <a:lnTo>
-                    <a:pt x="5944669" y="883771"/>
-                  </a:lnTo>
-                  <a:lnTo>
-                    <a:pt x="6016292" y="883892"/>
-                  </a:lnTo>
-                  <a:lnTo>
-                    <a:pt x="6087914" y="884013"/>
-                  </a:lnTo>
-                  <a:lnTo>
-                    <a:pt x="6159537" y="884134"/>
-                  </a:lnTo>
-                  <a:lnTo>
-                    <a:pt x="6231159" y="884255"/>
-                  </a:lnTo>
-                  <a:lnTo>
-                    <a:pt x="6302782" y="884376"/>
-                  </a:lnTo>
-                  <a:lnTo>
-                    <a:pt x="6374404" y="884498"/>
-                  </a:lnTo>
-                  <a:lnTo>
-                    <a:pt x="6446027" y="884619"/>
-                  </a:lnTo>
-                  <a:lnTo>
-                    <a:pt x="6517649" y="884740"/>
-                  </a:lnTo>
-                  <a:lnTo>
-                    <a:pt x="6589272" y="884860"/>
-                  </a:lnTo>
-                  <a:lnTo>
-                    <a:pt x="6660894" y="884981"/>
-                  </a:lnTo>
-                  <a:lnTo>
-                    <a:pt x="6732517" y="885102"/>
-                  </a:lnTo>
-                  <a:lnTo>
-                    <a:pt x="6804139" y="885223"/>
-                  </a:lnTo>
-                  <a:lnTo>
-                    <a:pt x="6875762" y="885344"/>
-                  </a:lnTo>
-                  <a:lnTo>
-                    <a:pt x="6947385" y="885465"/>
-                  </a:lnTo>
-                  <a:lnTo>
-                    <a:pt x="7019007" y="885586"/>
-                  </a:lnTo>
-                  <a:lnTo>
-                    <a:pt x="7090630" y="885707"/>
-                  </a:lnTo>
-                  <a:lnTo>
-                    <a:pt x="7090630" y="1128649"/>
-                  </a:lnTo>
-                  <a:lnTo>
-                    <a:pt x="7019007" y="1122274"/>
-                  </a:lnTo>
-                  <a:lnTo>
-                    <a:pt x="6947385" y="1115829"/>
-                  </a:lnTo>
-                  <a:lnTo>
-                    <a:pt x="6875762" y="1109313"/>
-                  </a:lnTo>
-                  <a:lnTo>
-                    <a:pt x="6804139" y="1102726"/>
-                  </a:lnTo>
-                  <a:lnTo>
-                    <a:pt x="6732517" y="1096067"/>
-                  </a:lnTo>
-                  <a:lnTo>
-                    <a:pt x="6660894" y="1089335"/>
-                  </a:lnTo>
-                  <a:lnTo>
-                    <a:pt x="6589272" y="1082530"/>
-                  </a:lnTo>
-                  <a:lnTo>
-                    <a:pt x="6517649" y="1075649"/>
-                  </a:lnTo>
-                  <a:lnTo>
-                    <a:pt x="6446027" y="1068694"/>
-                  </a:lnTo>
-                  <a:lnTo>
-                    <a:pt x="6374404" y="1061663"/>
-                  </a:lnTo>
-                  <a:lnTo>
-                    <a:pt x="6302782" y="1054554"/>
-                  </a:lnTo>
-                  <a:lnTo>
-                    <a:pt x="6231159" y="1047368"/>
-                  </a:lnTo>
-                  <a:lnTo>
-                    <a:pt x="6159537" y="1040103"/>
-                  </a:lnTo>
-                  <a:lnTo>
-                    <a:pt x="6087914" y="1032759"/>
-                  </a:lnTo>
-                  <a:lnTo>
-                    <a:pt x="6016292" y="1025334"/>
-                  </a:lnTo>
-                  <a:lnTo>
-                    <a:pt x="5944669" y="1017828"/>
-                  </a:lnTo>
-                  <a:lnTo>
-                    <a:pt x="5873047" y="1010240"/>
-                  </a:lnTo>
-                  <a:lnTo>
-                    <a:pt x="5801424" y="1002569"/>
-                  </a:lnTo>
-                  <a:lnTo>
-                    <a:pt x="5729802" y="994814"/>
-                  </a:lnTo>
-                  <a:lnTo>
-                    <a:pt x="5658179" y="986974"/>
-                  </a:lnTo>
-                  <a:lnTo>
-                    <a:pt x="5586557" y="979048"/>
-                  </a:lnTo>
-                  <a:lnTo>
-                    <a:pt x="5514934" y="971035"/>
-                  </a:lnTo>
-                  <a:lnTo>
-                    <a:pt x="5443311" y="962935"/>
-                  </a:lnTo>
-                  <a:lnTo>
-                    <a:pt x="5371689" y="954746"/>
-                  </a:lnTo>
-                  <a:lnTo>
-                    <a:pt x="5300066" y="946468"/>
-                  </a:lnTo>
-                  <a:lnTo>
-                    <a:pt x="5228444" y="938099"/>
-                  </a:lnTo>
-                  <a:lnTo>
-                    <a:pt x="5156821" y="929638"/>
-                  </a:lnTo>
-                  <a:lnTo>
-                    <a:pt x="5085199" y="921085"/>
-                  </a:lnTo>
-                  <a:lnTo>
-                    <a:pt x="5013576" y="912438"/>
-                  </a:lnTo>
-                  <a:lnTo>
-                    <a:pt x="4941954" y="903697"/>
-                  </a:lnTo>
-                  <a:lnTo>
-                    <a:pt x="4870331" y="894860"/>
-                  </a:lnTo>
-                  <a:lnTo>
-                    <a:pt x="4798709" y="885926"/>
-                  </a:lnTo>
-                  <a:lnTo>
-                    <a:pt x="4727086" y="881710"/>
-                  </a:lnTo>
-                  <a:lnTo>
-                    <a:pt x="4655464" y="881588"/>
-                  </a:lnTo>
-                  <a:lnTo>
-                    <a:pt x="4583841" y="881467"/>
-                  </a:lnTo>
-                  <a:lnTo>
-                    <a:pt x="4512219" y="881345"/>
-                  </a:lnTo>
-                  <a:lnTo>
-                    <a:pt x="4440596" y="881224"/>
-                  </a:lnTo>
-                  <a:lnTo>
-                    <a:pt x="4368974" y="881102"/>
-                  </a:lnTo>
-                  <a:lnTo>
-                    <a:pt x="4297351" y="880981"/>
-                  </a:lnTo>
-                  <a:lnTo>
-                    <a:pt x="4225729" y="880859"/>
-                  </a:lnTo>
-                  <a:lnTo>
-                    <a:pt x="4154106" y="880738"/>
-                  </a:lnTo>
-                  <a:lnTo>
-                    <a:pt x="4082483" y="880616"/>
-                  </a:lnTo>
-                  <a:lnTo>
-                    <a:pt x="4010861" y="880494"/>
-                  </a:lnTo>
-                  <a:lnTo>
-                    <a:pt x="3939238" y="880373"/>
-                  </a:lnTo>
-                  <a:lnTo>
-                    <a:pt x="3867616" y="880251"/>
-                  </a:lnTo>
-                  <a:lnTo>
-                    <a:pt x="3795993" y="880130"/>
-                  </a:lnTo>
-                  <a:lnTo>
-                    <a:pt x="3724371" y="880008"/>
-                  </a:lnTo>
-                  <a:lnTo>
-                    <a:pt x="3652748" y="879886"/>
-                  </a:lnTo>
-                  <a:lnTo>
-                    <a:pt x="3581126" y="879765"/>
-                  </a:lnTo>
-                  <a:lnTo>
-                    <a:pt x="3509503" y="879643"/>
-                  </a:lnTo>
-                  <a:lnTo>
-                    <a:pt x="3437881" y="879521"/>
-                  </a:lnTo>
-                  <a:lnTo>
-                    <a:pt x="3366258" y="879399"/>
-                  </a:lnTo>
-                  <a:lnTo>
-                    <a:pt x="3294636" y="879278"/>
-                  </a:lnTo>
-                  <a:lnTo>
-                    <a:pt x="3223013" y="879156"/>
-                  </a:lnTo>
-                  <a:lnTo>
-                    <a:pt x="3151391" y="879034"/>
-                  </a:lnTo>
-                  <a:lnTo>
-                    <a:pt x="3079768" y="878912"/>
-                  </a:lnTo>
-                  <a:lnTo>
-                    <a:pt x="3008146" y="878790"/>
-                  </a:lnTo>
-                  <a:lnTo>
-                    <a:pt x="2936523" y="878668"/>
-                  </a:lnTo>
-                  <a:lnTo>
-                    <a:pt x="2864901" y="878547"/>
-                  </a:lnTo>
-                  <a:lnTo>
-                    <a:pt x="2793278" y="878425"/>
-                  </a:lnTo>
-                  <a:lnTo>
-                    <a:pt x="2721655" y="878303"/>
-                  </a:lnTo>
-                  <a:lnTo>
-                    <a:pt x="2650033" y="878181"/>
-                  </a:lnTo>
-                  <a:lnTo>
-                    <a:pt x="2578410" y="878059"/>
-                  </a:lnTo>
-                  <a:lnTo>
-                    <a:pt x="2506788" y="877937"/>
-                  </a:lnTo>
-                  <a:lnTo>
-                    <a:pt x="2435165" y="877815"/>
-                  </a:lnTo>
-                  <a:lnTo>
-                    <a:pt x="2363543" y="877693"/>
-                  </a:lnTo>
-                  <a:lnTo>
-                    <a:pt x="2291920" y="877571"/>
-                  </a:lnTo>
-                  <a:lnTo>
-                    <a:pt x="2220298" y="877449"/>
-                  </a:lnTo>
-                  <a:lnTo>
-                    <a:pt x="2148675" y="877327"/>
-                  </a:lnTo>
-                  <a:lnTo>
-                    <a:pt x="2077053" y="877205"/>
-                  </a:lnTo>
-                  <a:lnTo>
-                    <a:pt x="2005430" y="877083"/>
-                  </a:lnTo>
-                  <a:lnTo>
-                    <a:pt x="1933808" y="876961"/>
-                  </a:lnTo>
-                  <a:lnTo>
-                    <a:pt x="1862185" y="876838"/>
-                  </a:lnTo>
-                  <a:lnTo>
-                    <a:pt x="1790563" y="876716"/>
-                  </a:lnTo>
-                  <a:lnTo>
-                    <a:pt x="1718940" y="876594"/>
-                  </a:lnTo>
-                  <a:lnTo>
-                    <a:pt x="1647318" y="876472"/>
-                  </a:lnTo>
-                  <a:lnTo>
-                    <a:pt x="1575695" y="876350"/>
-                  </a:lnTo>
-                  <a:lnTo>
-                    <a:pt x="1504073" y="876228"/>
-                  </a:lnTo>
-                  <a:lnTo>
-                    <a:pt x="1432450" y="876105"/>
-                  </a:lnTo>
-                  <a:lnTo>
-                    <a:pt x="1360827" y="875983"/>
-                  </a:lnTo>
-                  <a:lnTo>
-                    <a:pt x="1289205" y="875861"/>
-                  </a:lnTo>
-                  <a:lnTo>
-                    <a:pt x="1217582" y="875739"/>
-                  </a:lnTo>
-                  <a:lnTo>
-                    <a:pt x="1145960" y="875616"/>
-                  </a:lnTo>
-                  <a:lnTo>
-                    <a:pt x="1074337" y="875494"/>
-                  </a:lnTo>
-                  <a:lnTo>
-                    <a:pt x="1002715" y="875372"/>
-                  </a:lnTo>
-                  <a:lnTo>
-                    <a:pt x="931092" y="875249"/>
-                  </a:lnTo>
-                  <a:lnTo>
-                    <a:pt x="859470" y="875127"/>
-                  </a:lnTo>
-                  <a:lnTo>
-                    <a:pt x="787847" y="875004"/>
-                  </a:lnTo>
-                  <a:lnTo>
-                    <a:pt x="716225" y="874882"/>
-                  </a:lnTo>
-                  <a:lnTo>
-                    <a:pt x="644602" y="874760"/>
-                  </a:lnTo>
-                  <a:lnTo>
-                    <a:pt x="572980" y="874637"/>
-                  </a:lnTo>
-                  <a:lnTo>
-                    <a:pt x="501357" y="874515"/>
-                  </a:lnTo>
-                  <a:lnTo>
-                    <a:pt x="429735" y="874392"/>
-                  </a:lnTo>
-                  <a:lnTo>
-                    <a:pt x="358112" y="874270"/>
-                  </a:lnTo>
-                  <a:lnTo>
-                    <a:pt x="286490" y="874147"/>
-                  </a:lnTo>
-                  <a:lnTo>
-                    <a:pt x="214867" y="874025"/>
-                  </a:lnTo>
-                  <a:lnTo>
-                    <a:pt x="143245" y="873902"/>
-                  </a:lnTo>
-                  <a:lnTo>
-                    <a:pt x="71622" y="873780"/>
-                  </a:lnTo>
-                  <a:lnTo>
-                    <a:pt x="0" y="873657"/>
+                    <a:pt x="71622" y="18325"/>
+                  </a:lnTo>
+                  <a:lnTo>
+                    <a:pt x="143245" y="36453"/>
+                  </a:lnTo>
+                  <a:lnTo>
+                    <a:pt x="214867" y="54386"/>
+                  </a:lnTo>
+                  <a:lnTo>
+                    <a:pt x="286490" y="72126"/>
+                  </a:lnTo>
+                  <a:lnTo>
+                    <a:pt x="358112" y="89675"/>
+                  </a:lnTo>
+                  <a:lnTo>
+                    <a:pt x="429735" y="107036"/>
+                  </a:lnTo>
+                  <a:lnTo>
+                    <a:pt x="501357" y="124209"/>
+                  </a:lnTo>
+                  <a:lnTo>
+                    <a:pt x="572980" y="141198"/>
+                  </a:lnTo>
+                  <a:lnTo>
+                    <a:pt x="644602" y="158005"/>
+                  </a:lnTo>
+                  <a:lnTo>
+                    <a:pt x="716225" y="174630"/>
+                  </a:lnTo>
+                  <a:lnTo>
+                    <a:pt x="787847" y="191077"/>
+                  </a:lnTo>
+                  <a:lnTo>
+                    <a:pt x="859470" y="207346"/>
+                  </a:lnTo>
+                  <a:lnTo>
+                    <a:pt x="931092" y="223441"/>
+                  </a:lnTo>
+                  <a:lnTo>
+                    <a:pt x="1002715" y="239362"/>
+                  </a:lnTo>
+                  <a:lnTo>
+                    <a:pt x="1074337" y="255113"/>
+                  </a:lnTo>
+                  <a:lnTo>
+                    <a:pt x="1145960" y="270694"/>
+                  </a:lnTo>
+                  <a:lnTo>
+                    <a:pt x="1217582" y="286107"/>
+                  </a:lnTo>
+                  <a:lnTo>
+                    <a:pt x="1289205" y="301354"/>
+                  </a:lnTo>
+                  <a:lnTo>
+                    <a:pt x="1360827" y="316438"/>
+                  </a:lnTo>
+                  <a:lnTo>
+                    <a:pt x="1432450" y="331359"/>
+                  </a:lnTo>
+                  <a:lnTo>
+                    <a:pt x="1504073" y="346119"/>
+                  </a:lnTo>
+                  <a:lnTo>
+                    <a:pt x="1575695" y="360721"/>
+                  </a:lnTo>
+                  <a:lnTo>
+                    <a:pt x="1647318" y="375166"/>
+                  </a:lnTo>
+                  <a:lnTo>
+                    <a:pt x="1718940" y="389455"/>
+                  </a:lnTo>
+                  <a:lnTo>
+                    <a:pt x="1790563" y="403591"/>
+                  </a:lnTo>
+                  <a:lnTo>
+                    <a:pt x="1862185" y="417574"/>
+                  </a:lnTo>
+                  <a:lnTo>
+                    <a:pt x="1933808" y="431408"/>
+                  </a:lnTo>
+                  <a:lnTo>
+                    <a:pt x="2005430" y="445092"/>
+                  </a:lnTo>
+                  <a:lnTo>
+                    <a:pt x="2077053" y="458629"/>
+                  </a:lnTo>
+                  <a:lnTo>
+                    <a:pt x="2148675" y="472021"/>
+                  </a:lnTo>
+                  <a:lnTo>
+                    <a:pt x="2220298" y="485268"/>
+                  </a:lnTo>
+                  <a:lnTo>
+                    <a:pt x="2291920" y="498373"/>
+                  </a:lnTo>
+                  <a:lnTo>
+                    <a:pt x="2363543" y="511337"/>
+                  </a:lnTo>
+                  <a:lnTo>
+                    <a:pt x="2435165" y="524162"/>
+                  </a:lnTo>
+                  <a:lnTo>
+                    <a:pt x="2506788" y="536848"/>
+                  </a:lnTo>
+                  <a:lnTo>
+                    <a:pt x="2578410" y="549398"/>
+                  </a:lnTo>
+                  <a:lnTo>
+                    <a:pt x="2650033" y="561813"/>
+                  </a:lnTo>
+                  <a:lnTo>
+                    <a:pt x="2721655" y="574095"/>
+                  </a:lnTo>
+                  <a:lnTo>
+                    <a:pt x="2793278" y="586244"/>
+                  </a:lnTo>
+                  <a:lnTo>
+                    <a:pt x="2864901" y="598263"/>
+                  </a:lnTo>
+                  <a:lnTo>
+                    <a:pt x="2936523" y="610152"/>
+                  </a:lnTo>
+                  <a:lnTo>
+                    <a:pt x="3008146" y="621914"/>
+                  </a:lnTo>
+                  <a:lnTo>
+                    <a:pt x="3079768" y="633549"/>
+                  </a:lnTo>
+                  <a:lnTo>
+                    <a:pt x="3151391" y="645059"/>
+                  </a:lnTo>
+                  <a:lnTo>
+                    <a:pt x="3223013" y="656445"/>
+                  </a:lnTo>
+                  <a:lnTo>
+                    <a:pt x="3294636" y="667708"/>
+                  </a:lnTo>
+                  <a:lnTo>
+                    <a:pt x="3366258" y="678851"/>
+                  </a:lnTo>
+                  <a:lnTo>
+                    <a:pt x="3437881" y="689873"/>
+                  </a:lnTo>
+                  <a:lnTo>
+                    <a:pt x="3509503" y="700777"/>
+                  </a:lnTo>
+                  <a:lnTo>
+                    <a:pt x="3581126" y="711564"/>
+                  </a:lnTo>
+                  <a:lnTo>
+                    <a:pt x="3652748" y="722234"/>
+                  </a:lnTo>
+                  <a:lnTo>
+                    <a:pt x="3724371" y="732790"/>
+                  </a:lnTo>
+                  <a:lnTo>
+                    <a:pt x="3795993" y="743233"/>
+                  </a:lnTo>
+                  <a:lnTo>
+                    <a:pt x="3867616" y="753562"/>
+                  </a:lnTo>
+                  <a:lnTo>
+                    <a:pt x="3939238" y="763781"/>
+                  </a:lnTo>
+                  <a:lnTo>
+                    <a:pt x="4010861" y="773890"/>
+                  </a:lnTo>
+                  <a:lnTo>
+                    <a:pt x="4082483" y="783890"/>
+                  </a:lnTo>
+                  <a:lnTo>
+                    <a:pt x="4154106" y="793783"/>
+                  </a:lnTo>
+                  <a:lnTo>
+                    <a:pt x="4225729" y="803569"/>
+                  </a:lnTo>
+                  <a:lnTo>
+                    <a:pt x="4297351" y="813250"/>
+                  </a:lnTo>
+                  <a:lnTo>
+                    <a:pt x="4368974" y="822827"/>
+                  </a:lnTo>
+                  <a:lnTo>
+                    <a:pt x="4440596" y="832300"/>
+                  </a:lnTo>
+                  <a:lnTo>
+                    <a:pt x="4512219" y="841672"/>
+                  </a:lnTo>
+                  <a:lnTo>
+                    <a:pt x="4583841" y="850943"/>
+                  </a:lnTo>
+                  <a:lnTo>
+                    <a:pt x="4655464" y="860114"/>
+                  </a:lnTo>
+                  <a:lnTo>
+                    <a:pt x="4727086" y="869187"/>
+                  </a:lnTo>
+                  <a:lnTo>
+                    <a:pt x="4798709" y="874065"/>
+                  </a:lnTo>
+                  <a:lnTo>
+                    <a:pt x="4870331" y="874125"/>
+                  </a:lnTo>
+                  <a:lnTo>
+                    <a:pt x="4941954" y="874185"/>
+                  </a:lnTo>
+                  <a:lnTo>
+                    <a:pt x="5013576" y="874245"/>
+                  </a:lnTo>
+                  <a:lnTo>
+                    <a:pt x="5085199" y="874306"/>
+                  </a:lnTo>
+                  <a:lnTo>
+                    <a:pt x="5156821" y="874366"/>
+                  </a:lnTo>
+                  <a:lnTo>
+                    <a:pt x="5228444" y="874426"/>
+                  </a:lnTo>
+                  <a:lnTo>
+                    <a:pt x="5300066" y="874486"/>
+                  </a:lnTo>
+                  <a:lnTo>
+                    <a:pt x="5371689" y="874547"/>
+                  </a:lnTo>
+                  <a:lnTo>
+                    <a:pt x="5443311" y="874607"/>
+                  </a:lnTo>
+                  <a:lnTo>
+                    <a:pt x="5514934" y="874667"/>
+                  </a:lnTo>
+                  <a:lnTo>
+                    <a:pt x="5586557" y="874727"/>
+                  </a:lnTo>
+                  <a:lnTo>
+                    <a:pt x="5658179" y="874787"/>
+                  </a:lnTo>
+                  <a:lnTo>
+                    <a:pt x="5729802" y="874848"/>
+                  </a:lnTo>
+                  <a:lnTo>
+                    <a:pt x="5801424" y="874908"/>
+                  </a:lnTo>
+                  <a:lnTo>
+                    <a:pt x="5873047" y="874968"/>
+                  </a:lnTo>
+                  <a:lnTo>
+                    <a:pt x="5944669" y="875028"/>
+                  </a:lnTo>
+                  <a:lnTo>
+                    <a:pt x="6016292" y="875088"/>
+                  </a:lnTo>
+                  <a:lnTo>
+                    <a:pt x="6087914" y="875148"/>
+                  </a:lnTo>
+                  <a:lnTo>
+                    <a:pt x="6159537" y="875209"/>
+                  </a:lnTo>
+                  <a:lnTo>
+                    <a:pt x="6231159" y="875269"/>
+                  </a:lnTo>
+                  <a:lnTo>
+                    <a:pt x="6302782" y="875329"/>
+                  </a:lnTo>
+                  <a:lnTo>
+                    <a:pt x="6374404" y="875389"/>
+                  </a:lnTo>
+                  <a:lnTo>
+                    <a:pt x="6446027" y="875449"/>
+                  </a:lnTo>
+                  <a:lnTo>
+                    <a:pt x="6517649" y="875509"/>
+                  </a:lnTo>
+                  <a:lnTo>
+                    <a:pt x="6589272" y="875570"/>
+                  </a:lnTo>
+                  <a:lnTo>
+                    <a:pt x="6660894" y="875630"/>
+                  </a:lnTo>
+                  <a:lnTo>
+                    <a:pt x="6732517" y="875690"/>
+                  </a:lnTo>
+                  <a:lnTo>
+                    <a:pt x="6804139" y="875750"/>
+                  </a:lnTo>
+                  <a:lnTo>
+                    <a:pt x="6875762" y="875810"/>
+                  </a:lnTo>
+                  <a:lnTo>
+                    <a:pt x="6947385" y="875870"/>
+                  </a:lnTo>
+                  <a:lnTo>
+                    <a:pt x="7019007" y="875930"/>
+                  </a:lnTo>
+                  <a:lnTo>
+                    <a:pt x="7090630" y="875990"/>
+                  </a:lnTo>
+                  <a:lnTo>
+                    <a:pt x="7090630" y="1119622"/>
+                  </a:lnTo>
+                  <a:lnTo>
+                    <a:pt x="7019007" y="1113272"/>
+                  </a:lnTo>
+                  <a:lnTo>
+                    <a:pt x="6947385" y="1106854"/>
+                  </a:lnTo>
+                  <a:lnTo>
+                    <a:pt x="6875762" y="1100366"/>
+                  </a:lnTo>
+                  <a:lnTo>
+                    <a:pt x="6804139" y="1093807"/>
+                  </a:lnTo>
+                  <a:lnTo>
+                    <a:pt x="6732517" y="1087177"/>
+                  </a:lnTo>
+                  <a:lnTo>
+                    <a:pt x="6660894" y="1080475"/>
+                  </a:lnTo>
+                  <a:lnTo>
+                    <a:pt x="6589272" y="1073700"/>
+                  </a:lnTo>
+                  <a:lnTo>
+                    <a:pt x="6517649" y="1066852"/>
+                  </a:lnTo>
+                  <a:lnTo>
+                    <a:pt x="6446027" y="1059928"/>
+                  </a:lnTo>
+                  <a:lnTo>
+                    <a:pt x="6374404" y="1052930"/>
+                  </a:lnTo>
+                  <a:lnTo>
+                    <a:pt x="6302782" y="1045856"/>
+                  </a:lnTo>
+                  <a:lnTo>
+                    <a:pt x="6231159" y="1038704"/>
+                  </a:lnTo>
+                  <a:lnTo>
+                    <a:pt x="6159537" y="1031475"/>
+                  </a:lnTo>
+                  <a:lnTo>
+                    <a:pt x="6087914" y="1024167"/>
+                  </a:lnTo>
+                  <a:lnTo>
+                    <a:pt x="6016292" y="1016780"/>
+                  </a:lnTo>
+                  <a:lnTo>
+                    <a:pt x="5944669" y="1009312"/>
+                  </a:lnTo>
+                  <a:lnTo>
+                    <a:pt x="5873047" y="1001763"/>
+                  </a:lnTo>
+                  <a:lnTo>
+                    <a:pt x="5801424" y="994132"/>
+                  </a:lnTo>
+                  <a:lnTo>
+                    <a:pt x="5729802" y="986418"/>
+                  </a:lnTo>
+                  <a:lnTo>
+                    <a:pt x="5658179" y="978621"/>
+                  </a:lnTo>
+                  <a:lnTo>
+                    <a:pt x="5586557" y="970738"/>
+                  </a:lnTo>
+                  <a:lnTo>
+                    <a:pt x="5514934" y="962770"/>
+                  </a:lnTo>
+                  <a:lnTo>
+                    <a:pt x="5443311" y="954715"/>
+                  </a:lnTo>
+                  <a:lnTo>
+                    <a:pt x="5371689" y="946572"/>
+                  </a:lnTo>
+                  <a:lnTo>
+                    <a:pt x="5300066" y="938341"/>
+                  </a:lnTo>
+                  <a:lnTo>
+                    <a:pt x="5228444" y="930021"/>
+                  </a:lnTo>
+                  <a:lnTo>
+                    <a:pt x="5156821" y="921609"/>
+                  </a:lnTo>
+                  <a:lnTo>
+                    <a:pt x="5085199" y="913107"/>
+                  </a:lnTo>
+                  <a:lnTo>
+                    <a:pt x="5013576" y="904512"/>
+                  </a:lnTo>
+                  <a:lnTo>
+                    <a:pt x="4941954" y="895823"/>
+                  </a:lnTo>
+                  <a:lnTo>
+                    <a:pt x="4870331" y="887041"/>
+                  </a:lnTo>
+                  <a:lnTo>
+                    <a:pt x="4798709" y="878162"/>
+                  </a:lnTo>
+                  <a:lnTo>
+                    <a:pt x="4727086" y="874004"/>
+                  </a:lnTo>
+                  <a:lnTo>
+                    <a:pt x="4655464" y="873944"/>
+                  </a:lnTo>
+                  <a:lnTo>
+                    <a:pt x="4583841" y="873884"/>
+                  </a:lnTo>
+                  <a:lnTo>
+                    <a:pt x="4512219" y="873824"/>
+                  </a:lnTo>
+                  <a:lnTo>
+                    <a:pt x="4440596" y="873763"/>
+                  </a:lnTo>
+                  <a:lnTo>
+                    <a:pt x="4368974" y="873703"/>
+                  </a:lnTo>
+                  <a:lnTo>
+                    <a:pt x="4297351" y="873643"/>
+                  </a:lnTo>
+                  <a:lnTo>
+                    <a:pt x="4225729" y="873583"/>
+                  </a:lnTo>
+                  <a:lnTo>
+                    <a:pt x="4154106" y="873522"/>
+                  </a:lnTo>
+                  <a:lnTo>
+                    <a:pt x="4082483" y="873462"/>
+                  </a:lnTo>
+                  <a:lnTo>
+                    <a:pt x="4010861" y="873402"/>
+                  </a:lnTo>
+                  <a:lnTo>
+                    <a:pt x="3939238" y="873341"/>
+                  </a:lnTo>
+                  <a:lnTo>
+                    <a:pt x="3867616" y="873281"/>
+                  </a:lnTo>
+                  <a:lnTo>
+                    <a:pt x="3795993" y="873221"/>
+                  </a:lnTo>
+                  <a:lnTo>
+                    <a:pt x="3724371" y="873161"/>
+                  </a:lnTo>
+                  <a:lnTo>
+                    <a:pt x="3652748" y="873100"/>
+                  </a:lnTo>
+                  <a:lnTo>
+                    <a:pt x="3581126" y="873040"/>
+                  </a:lnTo>
+                  <a:lnTo>
+                    <a:pt x="3509503" y="872980"/>
+                  </a:lnTo>
+                  <a:lnTo>
+                    <a:pt x="3437881" y="872919"/>
+                  </a:lnTo>
+                  <a:lnTo>
+                    <a:pt x="3366258" y="872859"/>
+                  </a:lnTo>
+                  <a:lnTo>
+                    <a:pt x="3294636" y="872799"/>
+                  </a:lnTo>
+                  <a:lnTo>
+                    <a:pt x="3223013" y="872738"/>
+                  </a:lnTo>
+                  <a:lnTo>
+                    <a:pt x="3151391" y="872678"/>
+                  </a:lnTo>
+                  <a:lnTo>
+                    <a:pt x="3079768" y="872617"/>
+                  </a:lnTo>
+                  <a:lnTo>
+                    <a:pt x="3008146" y="872557"/>
+                  </a:lnTo>
+                  <a:lnTo>
+                    <a:pt x="2936523" y="872497"/>
+                  </a:lnTo>
+                  <a:lnTo>
+                    <a:pt x="2864901" y="872436"/>
+                  </a:lnTo>
+                  <a:lnTo>
+                    <a:pt x="2793278" y="872376"/>
+                  </a:lnTo>
+                  <a:lnTo>
+                    <a:pt x="2721655" y="872316"/>
+                  </a:lnTo>
+                  <a:lnTo>
+                    <a:pt x="2650033" y="872255"/>
+                  </a:lnTo>
+                  <a:lnTo>
+                    <a:pt x="2578410" y="872195"/>
+                  </a:lnTo>
+                  <a:lnTo>
+                    <a:pt x="2506788" y="872135"/>
+                  </a:lnTo>
+                  <a:lnTo>
+                    <a:pt x="2435165" y="872074"/>
+                  </a:lnTo>
+                  <a:lnTo>
+                    <a:pt x="2363543" y="872014"/>
+                  </a:lnTo>
+                  <a:lnTo>
+                    <a:pt x="2291920" y="871953"/>
+                  </a:lnTo>
+                  <a:lnTo>
+                    <a:pt x="2220298" y="871893"/>
+                  </a:lnTo>
+                  <a:lnTo>
+                    <a:pt x="2148675" y="871833"/>
+                  </a:lnTo>
+                  <a:lnTo>
+                    <a:pt x="2077053" y="871772"/>
+                  </a:lnTo>
+                  <a:lnTo>
+                    <a:pt x="2005430" y="871712"/>
+                  </a:lnTo>
+                  <a:lnTo>
+                    <a:pt x="1933808" y="871651"/>
+                  </a:lnTo>
+                  <a:lnTo>
+                    <a:pt x="1862185" y="871591"/>
+                  </a:lnTo>
+                  <a:lnTo>
+                    <a:pt x="1790563" y="871530"/>
+                  </a:lnTo>
+                  <a:lnTo>
+                    <a:pt x="1718940" y="871470"/>
+                  </a:lnTo>
+                  <a:lnTo>
+                    <a:pt x="1647318" y="871410"/>
+                  </a:lnTo>
+                  <a:lnTo>
+                    <a:pt x="1575695" y="871349"/>
+                  </a:lnTo>
+                  <a:lnTo>
+                    <a:pt x="1504073" y="871289"/>
+                  </a:lnTo>
+                  <a:lnTo>
+                    <a:pt x="1432450" y="871228"/>
+                  </a:lnTo>
+                  <a:lnTo>
+                    <a:pt x="1360827" y="871168"/>
+                  </a:lnTo>
+                  <a:lnTo>
+                    <a:pt x="1289205" y="871107"/>
+                  </a:lnTo>
+                  <a:lnTo>
+                    <a:pt x="1217582" y="871047"/>
+                  </a:lnTo>
+                  <a:lnTo>
+                    <a:pt x="1145960" y="870986"/>
+                  </a:lnTo>
+                  <a:lnTo>
+                    <a:pt x="1074337" y="870926"/>
+                  </a:lnTo>
+                  <a:lnTo>
+                    <a:pt x="1002715" y="870865"/>
+                  </a:lnTo>
+                  <a:lnTo>
+                    <a:pt x="931092" y="870805"/>
+                  </a:lnTo>
+                  <a:lnTo>
+                    <a:pt x="859470" y="870744"/>
+                  </a:lnTo>
+                  <a:lnTo>
+                    <a:pt x="787847" y="870684"/>
+                  </a:lnTo>
+                  <a:lnTo>
+                    <a:pt x="716225" y="870623"/>
+                  </a:lnTo>
+                  <a:lnTo>
+                    <a:pt x="644602" y="870563"/>
+                  </a:lnTo>
+                  <a:lnTo>
+                    <a:pt x="572980" y="870502"/>
+                  </a:lnTo>
+                  <a:lnTo>
+                    <a:pt x="501357" y="870442"/>
+                  </a:lnTo>
+                  <a:lnTo>
+                    <a:pt x="429735" y="870381"/>
+                  </a:lnTo>
+                  <a:lnTo>
+                    <a:pt x="358112" y="870321"/>
+                  </a:lnTo>
+                  <a:lnTo>
+                    <a:pt x="286490" y="870260"/>
+                  </a:lnTo>
+                  <a:lnTo>
+                    <a:pt x="214867" y="870200"/>
+                  </a:lnTo>
+                  <a:lnTo>
+                    <a:pt x="143245" y="870139"/>
+                  </a:lnTo>
+                  <a:lnTo>
+                    <a:pt x="71622" y="870079"/>
+                  </a:lnTo>
+                  <a:lnTo>
+                    <a:pt x="0" y="870018"/>
                   </a:lnTo>
                   <a:close/>
                 </a:path>
@@ -3676,312 +3676,312 @@
           </p:nvSpPr>
           <p:spPr>
             <a:xfrm>
-              <a:off x="1172049" y="3846010"/>
-              <a:ext cx="7090630" cy="885707"/>
+              <a:off x="1172049" y="3853748"/>
+              <a:ext cx="7090630" cy="875990"/>
             </a:xfrm>
             <a:custGeom>
               <a:avLst/>
               <a:pathLst>
-                <a:path w="7090630" h="885707">
+                <a:path w="7090630" h="875990">
                   <a:moveTo>
                     <a:pt x="0" y="0"/>
                   </a:moveTo>
                   <a:lnTo>
-                    <a:pt x="71622" y="18523"/>
-                  </a:lnTo>
-                  <a:lnTo>
-                    <a:pt x="143245" y="36846"/>
-                  </a:lnTo>
-                  <a:lnTo>
-                    <a:pt x="214867" y="54971"/>
-                  </a:lnTo>
-                  <a:lnTo>
-                    <a:pt x="286490" y="72900"/>
-                  </a:lnTo>
-                  <a:lnTo>
-                    <a:pt x="358112" y="90634"/>
-                  </a:lnTo>
-                  <a:lnTo>
-                    <a:pt x="429735" y="108177"/>
-                  </a:lnTo>
-                  <a:lnTo>
-                    <a:pt x="501357" y="125530"/>
-                  </a:lnTo>
-                  <a:lnTo>
-                    <a:pt x="572980" y="142695"/>
-                  </a:lnTo>
-                  <a:lnTo>
-                    <a:pt x="644602" y="159674"/>
-                  </a:lnTo>
-                  <a:lnTo>
-                    <a:pt x="716225" y="176469"/>
-                  </a:lnTo>
-                  <a:lnTo>
-                    <a:pt x="787847" y="193082"/>
-                  </a:lnTo>
-                  <a:lnTo>
-                    <a:pt x="859470" y="209516"/>
-                  </a:lnTo>
-                  <a:lnTo>
-                    <a:pt x="931092" y="225772"/>
-                  </a:lnTo>
-                  <a:lnTo>
-                    <a:pt x="1002715" y="241852"/>
-                  </a:lnTo>
-                  <a:lnTo>
-                    <a:pt x="1074337" y="257757"/>
-                  </a:lnTo>
-                  <a:lnTo>
-                    <a:pt x="1145960" y="273491"/>
-                  </a:lnTo>
-                  <a:lnTo>
-                    <a:pt x="1217582" y="289054"/>
-                  </a:lnTo>
-                  <a:lnTo>
-                    <a:pt x="1289205" y="304449"/>
-                  </a:lnTo>
-                  <a:lnTo>
-                    <a:pt x="1360827" y="319677"/>
-                  </a:lnTo>
-                  <a:lnTo>
-                    <a:pt x="1432450" y="334740"/>
-                  </a:lnTo>
-                  <a:lnTo>
-                    <a:pt x="1504073" y="349640"/>
-                  </a:lnTo>
-                  <a:lnTo>
-                    <a:pt x="1575695" y="364379"/>
-                  </a:lnTo>
-                  <a:lnTo>
-                    <a:pt x="1647318" y="378959"/>
-                  </a:lnTo>
-                  <a:lnTo>
-                    <a:pt x="1718940" y="393380"/>
-                  </a:lnTo>
-                  <a:lnTo>
-                    <a:pt x="1790563" y="407646"/>
-                  </a:lnTo>
-                  <a:lnTo>
-                    <a:pt x="1862185" y="421757"/>
-                  </a:lnTo>
-                  <a:lnTo>
-                    <a:pt x="1933808" y="435715"/>
-                  </a:lnTo>
-                  <a:lnTo>
-                    <a:pt x="2005430" y="449522"/>
-                  </a:lnTo>
-                  <a:lnTo>
-                    <a:pt x="2077053" y="463180"/>
-                  </a:lnTo>
-                  <a:lnTo>
-                    <a:pt x="2148675" y="476690"/>
-                  </a:lnTo>
-                  <a:lnTo>
-                    <a:pt x="2220298" y="490054"/>
-                  </a:lnTo>
-                  <a:lnTo>
-                    <a:pt x="2291920" y="503273"/>
-                  </a:lnTo>
-                  <a:lnTo>
-                    <a:pt x="2363543" y="516349"/>
-                  </a:lnTo>
-                  <a:lnTo>
-                    <a:pt x="2435165" y="529283"/>
-                  </a:lnTo>
-                  <a:lnTo>
-                    <a:pt x="2506788" y="542077"/>
-                  </a:lnTo>
-                  <a:lnTo>
-                    <a:pt x="2578410" y="554733"/>
-                  </a:lnTo>
-                  <a:lnTo>
-                    <a:pt x="2650033" y="567252"/>
-                  </a:lnTo>
-                  <a:lnTo>
-                    <a:pt x="2721655" y="579635"/>
-                  </a:lnTo>
-                  <a:lnTo>
-                    <a:pt x="2793278" y="591885"/>
-                  </a:lnTo>
-                  <a:lnTo>
-                    <a:pt x="2864901" y="604001"/>
-                  </a:lnTo>
-                  <a:lnTo>
-                    <a:pt x="2936523" y="615987"/>
-                  </a:lnTo>
-                  <a:lnTo>
-                    <a:pt x="3008146" y="627843"/>
-                  </a:lnTo>
-                  <a:lnTo>
-                    <a:pt x="3079768" y="639570"/>
-                  </a:lnTo>
-                  <a:lnTo>
-                    <a:pt x="3151391" y="651171"/>
-                  </a:lnTo>
-                  <a:lnTo>
-                    <a:pt x="3223013" y="662646"/>
-                  </a:lnTo>
-                  <a:lnTo>
-                    <a:pt x="3294636" y="673996"/>
-                  </a:lnTo>
-                  <a:lnTo>
-                    <a:pt x="3366258" y="685224"/>
-                  </a:lnTo>
-                  <a:lnTo>
-                    <a:pt x="3437881" y="696331"/>
-                  </a:lnTo>
-                  <a:lnTo>
-                    <a:pt x="3509503" y="707317"/>
-                  </a:lnTo>
-                  <a:lnTo>
-                    <a:pt x="3581126" y="718184"/>
-                  </a:lnTo>
-                  <a:lnTo>
-                    <a:pt x="3652748" y="728933"/>
-                  </a:lnTo>
-                  <a:lnTo>
-                    <a:pt x="3724371" y="739567"/>
-                  </a:lnTo>
-                  <a:lnTo>
-                    <a:pt x="3795993" y="750085"/>
-                  </a:lnTo>
-                  <a:lnTo>
-                    <a:pt x="3867616" y="760489"/>
-                  </a:lnTo>
-                  <a:lnTo>
-                    <a:pt x="3939238" y="770780"/>
-                  </a:lnTo>
-                  <a:lnTo>
-                    <a:pt x="4010861" y="780961"/>
-                  </a:lnTo>
-                  <a:lnTo>
-                    <a:pt x="4082483" y="791031"/>
-                  </a:lnTo>
-                  <a:lnTo>
-                    <a:pt x="4154106" y="800992"/>
-                  </a:lnTo>
-                  <a:lnTo>
-                    <a:pt x="4225729" y="810845"/>
-                  </a:lnTo>
-                  <a:lnTo>
-                    <a:pt x="4297351" y="820591"/>
-                  </a:lnTo>
-                  <a:lnTo>
-                    <a:pt x="4368974" y="830232"/>
-                  </a:lnTo>
-                  <a:lnTo>
-                    <a:pt x="4440596" y="839769"/>
-                  </a:lnTo>
-                  <a:lnTo>
-                    <a:pt x="4512219" y="849202"/>
-                  </a:lnTo>
-                  <a:lnTo>
-                    <a:pt x="4583841" y="858534"/>
-                  </a:lnTo>
-                  <a:lnTo>
-                    <a:pt x="4655464" y="867764"/>
-                  </a:lnTo>
-                  <a:lnTo>
-                    <a:pt x="4727086" y="876894"/>
-                  </a:lnTo>
-                  <a:lnTo>
-                    <a:pt x="4798709" y="881831"/>
-                  </a:lnTo>
-                  <a:lnTo>
-                    <a:pt x="4870331" y="881952"/>
-                  </a:lnTo>
-                  <a:lnTo>
-                    <a:pt x="4941954" y="882074"/>
-                  </a:lnTo>
-                  <a:lnTo>
-                    <a:pt x="5013576" y="882195"/>
-                  </a:lnTo>
-                  <a:lnTo>
-                    <a:pt x="5085199" y="882316"/>
-                  </a:lnTo>
-                  <a:lnTo>
-                    <a:pt x="5156821" y="882438"/>
-                  </a:lnTo>
-                  <a:lnTo>
-                    <a:pt x="5228444" y="882559"/>
-                  </a:lnTo>
-                  <a:lnTo>
-                    <a:pt x="5300066" y="882680"/>
-                  </a:lnTo>
-                  <a:lnTo>
-                    <a:pt x="5371689" y="882802"/>
-                  </a:lnTo>
-                  <a:lnTo>
-                    <a:pt x="5443311" y="882923"/>
-                  </a:lnTo>
-                  <a:lnTo>
-                    <a:pt x="5514934" y="883044"/>
-                  </a:lnTo>
-                  <a:lnTo>
-                    <a:pt x="5586557" y="883165"/>
-                  </a:lnTo>
-                  <a:lnTo>
-                    <a:pt x="5658179" y="883286"/>
-                  </a:lnTo>
-                  <a:lnTo>
-                    <a:pt x="5729802" y="883408"/>
-                  </a:lnTo>
-                  <a:lnTo>
-                    <a:pt x="5801424" y="883529"/>
-                  </a:lnTo>
-                  <a:lnTo>
-                    <a:pt x="5873047" y="883650"/>
-                  </a:lnTo>
-                  <a:lnTo>
-                    <a:pt x="5944669" y="883771"/>
-                  </a:lnTo>
-                  <a:lnTo>
-                    <a:pt x="6016292" y="883892"/>
-                  </a:lnTo>
-                  <a:lnTo>
-                    <a:pt x="6087914" y="884013"/>
-                  </a:lnTo>
-                  <a:lnTo>
-                    <a:pt x="6159537" y="884134"/>
-                  </a:lnTo>
-                  <a:lnTo>
-                    <a:pt x="6231159" y="884255"/>
-                  </a:lnTo>
-                  <a:lnTo>
-                    <a:pt x="6302782" y="884376"/>
-                  </a:lnTo>
-                  <a:lnTo>
-                    <a:pt x="6374404" y="884498"/>
-                  </a:lnTo>
-                  <a:lnTo>
-                    <a:pt x="6446027" y="884619"/>
-                  </a:lnTo>
-                  <a:lnTo>
-                    <a:pt x="6517649" y="884740"/>
-                  </a:lnTo>
-                  <a:lnTo>
-                    <a:pt x="6589272" y="884860"/>
-                  </a:lnTo>
-                  <a:lnTo>
-                    <a:pt x="6660894" y="884981"/>
-                  </a:lnTo>
-                  <a:lnTo>
-                    <a:pt x="6732517" y="885102"/>
-                  </a:lnTo>
-                  <a:lnTo>
-                    <a:pt x="6804139" y="885223"/>
-                  </a:lnTo>
-                  <a:lnTo>
-                    <a:pt x="6875762" y="885344"/>
-                  </a:lnTo>
-                  <a:lnTo>
-                    <a:pt x="6947385" y="885465"/>
-                  </a:lnTo>
-                  <a:lnTo>
-                    <a:pt x="7019007" y="885586"/>
-                  </a:lnTo>
-                  <a:lnTo>
-                    <a:pt x="7090630" y="885707"/>
+                    <a:pt x="71622" y="18325"/>
+                  </a:lnTo>
+                  <a:lnTo>
+                    <a:pt x="143245" y="36453"/>
+                  </a:lnTo>
+                  <a:lnTo>
+                    <a:pt x="214867" y="54386"/>
+                  </a:lnTo>
+                  <a:lnTo>
+                    <a:pt x="286490" y="72126"/>
+                  </a:lnTo>
+                  <a:lnTo>
+                    <a:pt x="358112" y="89675"/>
+                  </a:lnTo>
+                  <a:lnTo>
+                    <a:pt x="429735" y="107036"/>
+                  </a:lnTo>
+                  <a:lnTo>
+                    <a:pt x="501357" y="124209"/>
+                  </a:lnTo>
+                  <a:lnTo>
+                    <a:pt x="572980" y="141198"/>
+                  </a:lnTo>
+                  <a:lnTo>
+                    <a:pt x="644602" y="158005"/>
+                  </a:lnTo>
+                  <a:lnTo>
+                    <a:pt x="716225" y="174630"/>
+                  </a:lnTo>
+                  <a:lnTo>
+                    <a:pt x="787847" y="191077"/>
+                  </a:lnTo>
+                  <a:lnTo>
+                    <a:pt x="859470" y="207346"/>
+                  </a:lnTo>
+                  <a:lnTo>
+                    <a:pt x="931092" y="223441"/>
+                  </a:lnTo>
+                  <a:lnTo>
+                    <a:pt x="1002715" y="239362"/>
+                  </a:lnTo>
+                  <a:lnTo>
+                    <a:pt x="1074337" y="255113"/>
+                  </a:lnTo>
+                  <a:lnTo>
+                    <a:pt x="1145960" y="270694"/>
+                  </a:lnTo>
+                  <a:lnTo>
+                    <a:pt x="1217582" y="286107"/>
+                  </a:lnTo>
+                  <a:lnTo>
+                    <a:pt x="1289205" y="301354"/>
+                  </a:lnTo>
+                  <a:lnTo>
+                    <a:pt x="1360827" y="316438"/>
+                  </a:lnTo>
+                  <a:lnTo>
+                    <a:pt x="1432450" y="331359"/>
+                  </a:lnTo>
+                  <a:lnTo>
+                    <a:pt x="1504073" y="346119"/>
+                  </a:lnTo>
+                  <a:lnTo>
+                    <a:pt x="1575695" y="360721"/>
+                  </a:lnTo>
+                  <a:lnTo>
+                    <a:pt x="1647318" y="375166"/>
+                  </a:lnTo>
+                  <a:lnTo>
+                    <a:pt x="1718940" y="389455"/>
+                  </a:lnTo>
+                  <a:lnTo>
+                    <a:pt x="1790563" y="403591"/>
+                  </a:lnTo>
+                  <a:lnTo>
+                    <a:pt x="1862185" y="417574"/>
+                  </a:lnTo>
+                  <a:lnTo>
+                    <a:pt x="1933808" y="431408"/>
+                  </a:lnTo>
+                  <a:lnTo>
+                    <a:pt x="2005430" y="445092"/>
+                  </a:lnTo>
+                  <a:lnTo>
+                    <a:pt x="2077053" y="458629"/>
+                  </a:lnTo>
+                  <a:lnTo>
+                    <a:pt x="2148675" y="472021"/>
+                  </a:lnTo>
+                  <a:lnTo>
+                    <a:pt x="2220298" y="485268"/>
+                  </a:lnTo>
+                  <a:lnTo>
+                    <a:pt x="2291920" y="498373"/>
+                  </a:lnTo>
+                  <a:lnTo>
+                    <a:pt x="2363543" y="511337"/>
+                  </a:lnTo>
+                  <a:lnTo>
+                    <a:pt x="2435165" y="524162"/>
+                  </a:lnTo>
+                  <a:lnTo>
+                    <a:pt x="2506788" y="536848"/>
+                  </a:lnTo>
+                  <a:lnTo>
+                    <a:pt x="2578410" y="549398"/>
+                  </a:lnTo>
+                  <a:lnTo>
+                    <a:pt x="2650033" y="561813"/>
+                  </a:lnTo>
+                  <a:lnTo>
+                    <a:pt x="2721655" y="574095"/>
+                  </a:lnTo>
+                  <a:lnTo>
+                    <a:pt x="2793278" y="586244"/>
+                  </a:lnTo>
+                  <a:lnTo>
+                    <a:pt x="2864901" y="598263"/>
+                  </a:lnTo>
+                  <a:lnTo>
+                    <a:pt x="2936523" y="610152"/>
+                  </a:lnTo>
+                  <a:lnTo>
+                    <a:pt x="3008146" y="621914"/>
+                  </a:lnTo>
+                  <a:lnTo>
+                    <a:pt x="3079768" y="633549"/>
+                  </a:lnTo>
+                  <a:lnTo>
+                    <a:pt x="3151391" y="645059"/>
+                  </a:lnTo>
+                  <a:lnTo>
+                    <a:pt x="3223013" y="656445"/>
+                  </a:lnTo>
+                  <a:lnTo>
+                    <a:pt x="3294636" y="667708"/>
+                  </a:lnTo>
+                  <a:lnTo>
+                    <a:pt x="3366258" y="678851"/>
+                  </a:lnTo>
+                  <a:lnTo>
+                    <a:pt x="3437881" y="689873"/>
+                  </a:lnTo>
+                  <a:lnTo>
+                    <a:pt x="3509503" y="700777"/>
+                  </a:lnTo>
+                  <a:lnTo>
+                    <a:pt x="3581126" y="711564"/>
+                  </a:lnTo>
+                  <a:lnTo>
+                    <a:pt x="3652748" y="722234"/>
+                  </a:lnTo>
+                  <a:lnTo>
+                    <a:pt x="3724371" y="732790"/>
+                  </a:lnTo>
+                  <a:lnTo>
+                    <a:pt x="3795993" y="743233"/>
+                  </a:lnTo>
+                  <a:lnTo>
+                    <a:pt x="3867616" y="753562"/>
+                  </a:lnTo>
+                  <a:lnTo>
+                    <a:pt x="3939238" y="763781"/>
+                  </a:lnTo>
+                  <a:lnTo>
+                    <a:pt x="4010861" y="773890"/>
+                  </a:lnTo>
+                  <a:lnTo>
+                    <a:pt x="4082483" y="783890"/>
+                  </a:lnTo>
+                  <a:lnTo>
+                    <a:pt x="4154106" y="793783"/>
+                  </a:lnTo>
+                  <a:lnTo>
+                    <a:pt x="4225729" y="803569"/>
+                  </a:lnTo>
+                  <a:lnTo>
+                    <a:pt x="4297351" y="813250"/>
+                  </a:lnTo>
+                  <a:lnTo>
+                    <a:pt x="4368974" y="822827"/>
+                  </a:lnTo>
+                  <a:lnTo>
+                    <a:pt x="4440596" y="832300"/>
+                  </a:lnTo>
+                  <a:lnTo>
+                    <a:pt x="4512219" y="841672"/>
+                  </a:lnTo>
+                  <a:lnTo>
+                    <a:pt x="4583841" y="850943"/>
+                  </a:lnTo>
+                  <a:lnTo>
+                    <a:pt x="4655464" y="860114"/>
+                  </a:lnTo>
+                  <a:lnTo>
+                    <a:pt x="4727086" y="869187"/>
+                  </a:lnTo>
+                  <a:lnTo>
+                    <a:pt x="4798709" y="874065"/>
+                  </a:lnTo>
+                  <a:lnTo>
+                    <a:pt x="4870331" y="874125"/>
+                  </a:lnTo>
+                  <a:lnTo>
+                    <a:pt x="4941954" y="874185"/>
+                  </a:lnTo>
+                  <a:lnTo>
+                    <a:pt x="5013576" y="874245"/>
+                  </a:lnTo>
+                  <a:lnTo>
+                    <a:pt x="5085199" y="874306"/>
+                  </a:lnTo>
+                  <a:lnTo>
+                    <a:pt x="5156821" y="874366"/>
+                  </a:lnTo>
+                  <a:lnTo>
+                    <a:pt x="5228444" y="874426"/>
+                  </a:lnTo>
+                  <a:lnTo>
+                    <a:pt x="5300066" y="874486"/>
+                  </a:lnTo>
+                  <a:lnTo>
+                    <a:pt x="5371689" y="874547"/>
+                  </a:lnTo>
+                  <a:lnTo>
+                    <a:pt x="5443311" y="874607"/>
+                  </a:lnTo>
+                  <a:lnTo>
+                    <a:pt x="5514934" y="874667"/>
+                  </a:lnTo>
+                  <a:lnTo>
+                    <a:pt x="5586557" y="874727"/>
+                  </a:lnTo>
+                  <a:lnTo>
+                    <a:pt x="5658179" y="874787"/>
+                  </a:lnTo>
+                  <a:lnTo>
+                    <a:pt x="5729802" y="874848"/>
+                  </a:lnTo>
+                  <a:lnTo>
+                    <a:pt x="5801424" y="874908"/>
+                  </a:lnTo>
+                  <a:lnTo>
+                    <a:pt x="5873047" y="874968"/>
+                  </a:lnTo>
+                  <a:lnTo>
+                    <a:pt x="5944669" y="875028"/>
+                  </a:lnTo>
+                  <a:lnTo>
+                    <a:pt x="6016292" y="875088"/>
+                  </a:lnTo>
+                  <a:lnTo>
+                    <a:pt x="6087914" y="875148"/>
+                  </a:lnTo>
+                  <a:lnTo>
+                    <a:pt x="6159537" y="875209"/>
+                  </a:lnTo>
+                  <a:lnTo>
+                    <a:pt x="6231159" y="875269"/>
+                  </a:lnTo>
+                  <a:lnTo>
+                    <a:pt x="6302782" y="875329"/>
+                  </a:lnTo>
+                  <a:lnTo>
+                    <a:pt x="6374404" y="875389"/>
+                  </a:lnTo>
+                  <a:lnTo>
+                    <a:pt x="6446027" y="875449"/>
+                  </a:lnTo>
+                  <a:lnTo>
+                    <a:pt x="6517649" y="875509"/>
+                  </a:lnTo>
+                  <a:lnTo>
+                    <a:pt x="6589272" y="875570"/>
+                  </a:lnTo>
+                  <a:lnTo>
+                    <a:pt x="6660894" y="875630"/>
+                  </a:lnTo>
+                  <a:lnTo>
+                    <a:pt x="6732517" y="875690"/>
+                  </a:lnTo>
+                  <a:lnTo>
+                    <a:pt x="6804139" y="875750"/>
+                  </a:lnTo>
+                  <a:lnTo>
+                    <a:pt x="6875762" y="875810"/>
+                  </a:lnTo>
+                  <a:lnTo>
+                    <a:pt x="6947385" y="875870"/>
+                  </a:lnTo>
+                  <a:lnTo>
+                    <a:pt x="7019007" y="875930"/>
+                  </a:lnTo>
+                  <a:lnTo>
+                    <a:pt x="7090630" y="875990"/>
                   </a:lnTo>
                 </a:path>
               </a:pathLst>
@@ -4001,309 +4001,309 @@
           </p:nvSpPr>
           <p:spPr>
             <a:xfrm>
-              <a:off x="1172049" y="4719668"/>
-              <a:ext cx="7090630" cy="254992"/>
+              <a:off x="1172049" y="4723767"/>
+              <a:ext cx="7090630" cy="249603"/>
             </a:xfrm>
             <a:custGeom>
               <a:avLst/>
               <a:pathLst>
-                <a:path w="7090630" h="254992">
+                <a:path w="7090630" h="249603">
                   <a:moveTo>
-                    <a:pt x="7090630" y="254992"/>
+                    <a:pt x="7090630" y="249603"/>
                   </a:moveTo>
                   <a:lnTo>
-                    <a:pt x="7019007" y="248617"/>
-                  </a:lnTo>
-                  <a:lnTo>
-                    <a:pt x="6947385" y="242171"/>
-                  </a:lnTo>
-                  <a:lnTo>
-                    <a:pt x="6875762" y="235656"/>
-                  </a:lnTo>
-                  <a:lnTo>
-                    <a:pt x="6804139" y="229069"/>
-                  </a:lnTo>
-                  <a:lnTo>
-                    <a:pt x="6732517" y="222410"/>
-                  </a:lnTo>
-                  <a:lnTo>
-                    <a:pt x="6660894" y="215678"/>
-                  </a:lnTo>
-                  <a:lnTo>
-                    <a:pt x="6589272" y="208872"/>
-                  </a:lnTo>
-                  <a:lnTo>
-                    <a:pt x="6517649" y="201992"/>
-                  </a:lnTo>
-                  <a:lnTo>
-                    <a:pt x="6446027" y="195037"/>
-                  </a:lnTo>
-                  <a:lnTo>
-                    <a:pt x="6374404" y="188005"/>
-                  </a:lnTo>
-                  <a:lnTo>
-                    <a:pt x="6302782" y="180897"/>
-                  </a:lnTo>
-                  <a:lnTo>
-                    <a:pt x="6231159" y="173711"/>
-                  </a:lnTo>
-                  <a:lnTo>
-                    <a:pt x="6159537" y="166446"/>
-                  </a:lnTo>
-                  <a:lnTo>
-                    <a:pt x="6087914" y="159101"/>
-                  </a:lnTo>
-                  <a:lnTo>
-                    <a:pt x="6016292" y="151677"/>
-                  </a:lnTo>
-                  <a:lnTo>
-                    <a:pt x="5944669" y="144171"/>
-                  </a:lnTo>
-                  <a:lnTo>
-                    <a:pt x="5873047" y="136582"/>
-                  </a:lnTo>
-                  <a:lnTo>
-                    <a:pt x="5801424" y="128911"/>
-                  </a:lnTo>
-                  <a:lnTo>
-                    <a:pt x="5729802" y="121156"/>
-                  </a:lnTo>
-                  <a:lnTo>
-                    <a:pt x="5658179" y="113316"/>
-                  </a:lnTo>
-                  <a:lnTo>
-                    <a:pt x="5586557" y="105390"/>
-                  </a:lnTo>
-                  <a:lnTo>
-                    <a:pt x="5514934" y="97378"/>
-                  </a:lnTo>
-                  <a:lnTo>
-                    <a:pt x="5443311" y="89278"/>
-                  </a:lnTo>
-                  <a:lnTo>
-                    <a:pt x="5371689" y="81089"/>
-                  </a:lnTo>
-                  <a:lnTo>
-                    <a:pt x="5300066" y="72811"/>
-                  </a:lnTo>
-                  <a:lnTo>
-                    <a:pt x="5228444" y="64441"/>
-                  </a:lnTo>
-                  <a:lnTo>
-                    <a:pt x="5156821" y="55981"/>
-                  </a:lnTo>
-                  <a:lnTo>
-                    <a:pt x="5085199" y="47428"/>
-                  </a:lnTo>
-                  <a:lnTo>
-                    <a:pt x="5013576" y="38781"/>
-                  </a:lnTo>
-                  <a:lnTo>
-                    <a:pt x="4941954" y="30039"/>
-                  </a:lnTo>
-                  <a:lnTo>
-                    <a:pt x="4870331" y="21202"/>
-                  </a:lnTo>
-                  <a:lnTo>
-                    <a:pt x="4798709" y="12269"/>
-                  </a:lnTo>
-                  <a:lnTo>
-                    <a:pt x="4727086" y="8052"/>
-                  </a:lnTo>
-                  <a:lnTo>
-                    <a:pt x="4655464" y="7931"/>
-                  </a:lnTo>
-                  <a:lnTo>
-                    <a:pt x="4583841" y="7809"/>
-                  </a:lnTo>
-                  <a:lnTo>
-                    <a:pt x="4512219" y="7688"/>
-                  </a:lnTo>
-                  <a:lnTo>
-                    <a:pt x="4440596" y="7566"/>
-                  </a:lnTo>
-                  <a:lnTo>
-                    <a:pt x="4368974" y="7445"/>
-                  </a:lnTo>
-                  <a:lnTo>
-                    <a:pt x="4297351" y="7323"/>
-                  </a:lnTo>
-                  <a:lnTo>
-                    <a:pt x="4225729" y="7202"/>
-                  </a:lnTo>
-                  <a:lnTo>
-                    <a:pt x="4154106" y="7080"/>
-                  </a:lnTo>
-                  <a:lnTo>
-                    <a:pt x="4082483" y="6959"/>
-                  </a:lnTo>
-                  <a:lnTo>
-                    <a:pt x="4010861" y="6837"/>
-                  </a:lnTo>
-                  <a:lnTo>
-                    <a:pt x="3939238" y="6715"/>
-                  </a:lnTo>
-                  <a:lnTo>
-                    <a:pt x="3867616" y="6594"/>
-                  </a:lnTo>
-                  <a:lnTo>
-                    <a:pt x="3795993" y="6472"/>
-                  </a:lnTo>
-                  <a:lnTo>
-                    <a:pt x="3724371" y="6350"/>
-                  </a:lnTo>
-                  <a:lnTo>
-                    <a:pt x="3652748" y="6229"/>
-                  </a:lnTo>
-                  <a:lnTo>
-                    <a:pt x="3581126" y="6107"/>
-                  </a:lnTo>
-                  <a:lnTo>
-                    <a:pt x="3509503" y="5985"/>
-                  </a:lnTo>
-                  <a:lnTo>
-                    <a:pt x="3437881" y="5864"/>
-                  </a:lnTo>
-                  <a:lnTo>
-                    <a:pt x="3366258" y="5742"/>
-                  </a:lnTo>
-                  <a:lnTo>
-                    <a:pt x="3294636" y="5620"/>
-                  </a:lnTo>
-                  <a:lnTo>
-                    <a:pt x="3223013" y="5498"/>
-                  </a:lnTo>
-                  <a:lnTo>
-                    <a:pt x="3151391" y="5377"/>
-                  </a:lnTo>
-                  <a:lnTo>
-                    <a:pt x="3079768" y="5255"/>
-                  </a:lnTo>
-                  <a:lnTo>
-                    <a:pt x="3008146" y="5133"/>
-                  </a:lnTo>
-                  <a:lnTo>
-                    <a:pt x="2936523" y="5011"/>
-                  </a:lnTo>
-                  <a:lnTo>
-                    <a:pt x="2864901" y="4889"/>
-                  </a:lnTo>
-                  <a:lnTo>
-                    <a:pt x="2793278" y="4767"/>
-                  </a:lnTo>
-                  <a:lnTo>
-                    <a:pt x="2721655" y="4645"/>
-                  </a:lnTo>
-                  <a:lnTo>
-                    <a:pt x="2650033" y="4523"/>
-                  </a:lnTo>
-                  <a:lnTo>
-                    <a:pt x="2578410" y="4401"/>
-                  </a:lnTo>
-                  <a:lnTo>
-                    <a:pt x="2506788" y="4280"/>
-                  </a:lnTo>
-                  <a:lnTo>
-                    <a:pt x="2435165" y="4158"/>
-                  </a:lnTo>
-                  <a:lnTo>
-                    <a:pt x="2363543" y="4036"/>
-                  </a:lnTo>
-                  <a:lnTo>
-                    <a:pt x="2291920" y="3914"/>
-                  </a:lnTo>
-                  <a:lnTo>
-                    <a:pt x="2220298" y="3791"/>
-                  </a:lnTo>
-                  <a:lnTo>
-                    <a:pt x="2148675" y="3669"/>
-                  </a:lnTo>
-                  <a:lnTo>
-                    <a:pt x="2077053" y="3547"/>
-                  </a:lnTo>
-                  <a:lnTo>
-                    <a:pt x="2005430" y="3425"/>
-                  </a:lnTo>
-                  <a:lnTo>
-                    <a:pt x="1933808" y="3303"/>
-                  </a:lnTo>
-                  <a:lnTo>
-                    <a:pt x="1862185" y="3181"/>
-                  </a:lnTo>
-                  <a:lnTo>
-                    <a:pt x="1790563" y="3059"/>
-                  </a:lnTo>
-                  <a:lnTo>
-                    <a:pt x="1718940" y="2937"/>
-                  </a:lnTo>
-                  <a:lnTo>
-                    <a:pt x="1647318" y="2815"/>
-                  </a:lnTo>
-                  <a:lnTo>
-                    <a:pt x="1575695" y="2692"/>
-                  </a:lnTo>
-                  <a:lnTo>
-                    <a:pt x="1504073" y="2570"/>
-                  </a:lnTo>
-                  <a:lnTo>
-                    <a:pt x="1432450" y="2448"/>
-                  </a:lnTo>
-                  <a:lnTo>
-                    <a:pt x="1360827" y="2326"/>
-                  </a:lnTo>
-                  <a:lnTo>
-                    <a:pt x="1289205" y="2203"/>
-                  </a:lnTo>
-                  <a:lnTo>
-                    <a:pt x="1217582" y="2081"/>
-                  </a:lnTo>
-                  <a:lnTo>
-                    <a:pt x="1145960" y="1959"/>
-                  </a:lnTo>
-                  <a:lnTo>
-                    <a:pt x="1074337" y="1836"/>
-                  </a:lnTo>
-                  <a:lnTo>
-                    <a:pt x="1002715" y="1714"/>
-                  </a:lnTo>
-                  <a:lnTo>
-                    <a:pt x="931092" y="1592"/>
-                  </a:lnTo>
-                  <a:lnTo>
-                    <a:pt x="859470" y="1469"/>
-                  </a:lnTo>
-                  <a:lnTo>
-                    <a:pt x="787847" y="1347"/>
-                  </a:lnTo>
-                  <a:lnTo>
-                    <a:pt x="716225" y="1225"/>
-                  </a:lnTo>
-                  <a:lnTo>
-                    <a:pt x="644602" y="1102"/>
-                  </a:lnTo>
-                  <a:lnTo>
-                    <a:pt x="572980" y="980"/>
-                  </a:lnTo>
-                  <a:lnTo>
-                    <a:pt x="501357" y="857"/>
-                  </a:lnTo>
-                  <a:lnTo>
-                    <a:pt x="429735" y="735"/>
-                  </a:lnTo>
-                  <a:lnTo>
-                    <a:pt x="358112" y="612"/>
-                  </a:lnTo>
-                  <a:lnTo>
-                    <a:pt x="286490" y="490"/>
-                  </a:lnTo>
-                  <a:lnTo>
-                    <a:pt x="214867" y="367"/>
-                  </a:lnTo>
-                  <a:lnTo>
-                    <a:pt x="143245" y="245"/>
-                  </a:lnTo>
-                  <a:lnTo>
-                    <a:pt x="71622" y="122"/>
+                    <a:pt x="7019007" y="243254"/>
+                  </a:lnTo>
+                  <a:lnTo>
+                    <a:pt x="6947385" y="236835"/>
+                  </a:lnTo>
+                  <a:lnTo>
+                    <a:pt x="6875762" y="230347"/>
+                  </a:lnTo>
+                  <a:lnTo>
+                    <a:pt x="6804139" y="223789"/>
+                  </a:lnTo>
+                  <a:lnTo>
+                    <a:pt x="6732517" y="217159"/>
+                  </a:lnTo>
+                  <a:lnTo>
+                    <a:pt x="6660894" y="210457"/>
+                  </a:lnTo>
+                  <a:lnTo>
+                    <a:pt x="6589272" y="203682"/>
+                  </a:lnTo>
+                  <a:lnTo>
+                    <a:pt x="6517649" y="196833"/>
+                  </a:lnTo>
+                  <a:lnTo>
+                    <a:pt x="6446027" y="189910"/>
+                  </a:lnTo>
+                  <a:lnTo>
+                    <a:pt x="6374404" y="182911"/>
+                  </a:lnTo>
+                  <a:lnTo>
+                    <a:pt x="6302782" y="175837"/>
+                  </a:lnTo>
+                  <a:lnTo>
+                    <a:pt x="6231159" y="168685"/>
+                  </a:lnTo>
+                  <a:lnTo>
+                    <a:pt x="6159537" y="161456"/>
+                  </a:lnTo>
+                  <a:lnTo>
+                    <a:pt x="6087914" y="154148"/>
+                  </a:lnTo>
+                  <a:lnTo>
+                    <a:pt x="6016292" y="146761"/>
+                  </a:lnTo>
+                  <a:lnTo>
+                    <a:pt x="5944669" y="139293"/>
+                  </a:lnTo>
+                  <a:lnTo>
+                    <a:pt x="5873047" y="131745"/>
+                  </a:lnTo>
+                  <a:lnTo>
+                    <a:pt x="5801424" y="124114"/>
+                  </a:lnTo>
+                  <a:lnTo>
+                    <a:pt x="5729802" y="116400"/>
+                  </a:lnTo>
+                  <a:lnTo>
+                    <a:pt x="5658179" y="108602"/>
+                  </a:lnTo>
+                  <a:lnTo>
+                    <a:pt x="5586557" y="100719"/>
+                  </a:lnTo>
+                  <a:lnTo>
+                    <a:pt x="5514934" y="92751"/>
+                  </a:lnTo>
+                  <a:lnTo>
+                    <a:pt x="5443311" y="84696"/>
+                  </a:lnTo>
+                  <a:lnTo>
+                    <a:pt x="5371689" y="76554"/>
+                  </a:lnTo>
+                  <a:lnTo>
+                    <a:pt x="5300066" y="68322"/>
+                  </a:lnTo>
+                  <a:lnTo>
+                    <a:pt x="5228444" y="60002"/>
+                  </a:lnTo>
+                  <a:lnTo>
+                    <a:pt x="5156821" y="51591"/>
+                  </a:lnTo>
+                  <a:lnTo>
+                    <a:pt x="5085199" y="43088"/>
+                  </a:lnTo>
+                  <a:lnTo>
+                    <a:pt x="5013576" y="34493"/>
+                  </a:lnTo>
+                  <a:lnTo>
+                    <a:pt x="4941954" y="25805"/>
+                  </a:lnTo>
+                  <a:lnTo>
+                    <a:pt x="4870331" y="17022"/>
+                  </a:lnTo>
+                  <a:lnTo>
+                    <a:pt x="4798709" y="8143"/>
+                  </a:lnTo>
+                  <a:lnTo>
+                    <a:pt x="4727086" y="3986"/>
+                  </a:lnTo>
+                  <a:lnTo>
+                    <a:pt x="4655464" y="3926"/>
+                  </a:lnTo>
+                  <a:lnTo>
+                    <a:pt x="4583841" y="3865"/>
+                  </a:lnTo>
+                  <a:lnTo>
+                    <a:pt x="4512219" y="3805"/>
+                  </a:lnTo>
+                  <a:lnTo>
+                    <a:pt x="4440596" y="3745"/>
+                  </a:lnTo>
+                  <a:lnTo>
+                    <a:pt x="4368974" y="3684"/>
+                  </a:lnTo>
+                  <a:lnTo>
+                    <a:pt x="4297351" y="3624"/>
+                  </a:lnTo>
+                  <a:lnTo>
+                    <a:pt x="4225729" y="3564"/>
+                  </a:lnTo>
+                  <a:lnTo>
+                    <a:pt x="4154106" y="3504"/>
+                  </a:lnTo>
+                  <a:lnTo>
+                    <a:pt x="4082483" y="3443"/>
+                  </a:lnTo>
+                  <a:lnTo>
+                    <a:pt x="4010861" y="3383"/>
+                  </a:lnTo>
+                  <a:lnTo>
+                    <a:pt x="3939238" y="3323"/>
+                  </a:lnTo>
+                  <a:lnTo>
+                    <a:pt x="3867616" y="3262"/>
+                  </a:lnTo>
+                  <a:lnTo>
+                    <a:pt x="3795993" y="3202"/>
+                  </a:lnTo>
+                  <a:lnTo>
+                    <a:pt x="3724371" y="3142"/>
+                  </a:lnTo>
+                  <a:lnTo>
+                    <a:pt x="3652748" y="3081"/>
+                  </a:lnTo>
+                  <a:lnTo>
+                    <a:pt x="3581126" y="3021"/>
+                  </a:lnTo>
+                  <a:lnTo>
+                    <a:pt x="3509503" y="2961"/>
+                  </a:lnTo>
+                  <a:lnTo>
+                    <a:pt x="3437881" y="2900"/>
+                  </a:lnTo>
+                  <a:lnTo>
+                    <a:pt x="3366258" y="2840"/>
+                  </a:lnTo>
+                  <a:lnTo>
+                    <a:pt x="3294636" y="2780"/>
+                  </a:lnTo>
+                  <a:lnTo>
+                    <a:pt x="3223013" y="2719"/>
+                  </a:lnTo>
+                  <a:lnTo>
+                    <a:pt x="3151391" y="2659"/>
+                  </a:lnTo>
+                  <a:lnTo>
+                    <a:pt x="3079768" y="2599"/>
+                  </a:lnTo>
+                  <a:lnTo>
+                    <a:pt x="3008146" y="2538"/>
+                  </a:lnTo>
+                  <a:lnTo>
+                    <a:pt x="2936523" y="2478"/>
+                  </a:lnTo>
+                  <a:lnTo>
+                    <a:pt x="2864901" y="2418"/>
+                  </a:lnTo>
+                  <a:lnTo>
+                    <a:pt x="2793278" y="2357"/>
+                  </a:lnTo>
+                  <a:lnTo>
+                    <a:pt x="2721655" y="2297"/>
+                  </a:lnTo>
+                  <a:lnTo>
+                    <a:pt x="2650033" y="2237"/>
+                  </a:lnTo>
+                  <a:lnTo>
+                    <a:pt x="2578410" y="2176"/>
+                  </a:lnTo>
+                  <a:lnTo>
+                    <a:pt x="2506788" y="2116"/>
+                  </a:lnTo>
+                  <a:lnTo>
+                    <a:pt x="2435165" y="2055"/>
+                  </a:lnTo>
+                  <a:lnTo>
+                    <a:pt x="2363543" y="1995"/>
+                  </a:lnTo>
+                  <a:lnTo>
+                    <a:pt x="2291920" y="1935"/>
+                  </a:lnTo>
+                  <a:lnTo>
+                    <a:pt x="2220298" y="1874"/>
+                  </a:lnTo>
+                  <a:lnTo>
+                    <a:pt x="2148675" y="1814"/>
+                  </a:lnTo>
+                  <a:lnTo>
+                    <a:pt x="2077053" y="1753"/>
+                  </a:lnTo>
+                  <a:lnTo>
+                    <a:pt x="2005430" y="1693"/>
+                  </a:lnTo>
+                  <a:lnTo>
+                    <a:pt x="1933808" y="1633"/>
+                  </a:lnTo>
+                  <a:lnTo>
+                    <a:pt x="1862185" y="1572"/>
+                  </a:lnTo>
+                  <a:lnTo>
+                    <a:pt x="1790563" y="1512"/>
+                  </a:lnTo>
+                  <a:lnTo>
+                    <a:pt x="1718940" y="1451"/>
+                  </a:lnTo>
+                  <a:lnTo>
+                    <a:pt x="1647318" y="1391"/>
+                  </a:lnTo>
+                  <a:lnTo>
+                    <a:pt x="1575695" y="1330"/>
+                  </a:lnTo>
+                  <a:lnTo>
+                    <a:pt x="1504073" y="1270"/>
+                  </a:lnTo>
+                  <a:lnTo>
+                    <a:pt x="1432450" y="1209"/>
+                  </a:lnTo>
+                  <a:lnTo>
+                    <a:pt x="1360827" y="1149"/>
+                  </a:lnTo>
+                  <a:lnTo>
+                    <a:pt x="1289205" y="1089"/>
+                  </a:lnTo>
+                  <a:lnTo>
+                    <a:pt x="1217582" y="1028"/>
+                  </a:lnTo>
+                  <a:lnTo>
+                    <a:pt x="1145960" y="968"/>
+                  </a:lnTo>
+                  <a:lnTo>
+                    <a:pt x="1074337" y="907"/>
+                  </a:lnTo>
+                  <a:lnTo>
+                    <a:pt x="1002715" y="847"/>
+                  </a:lnTo>
+                  <a:lnTo>
+                    <a:pt x="931092" y="786"/>
+                  </a:lnTo>
+                  <a:lnTo>
+                    <a:pt x="859470" y="726"/>
+                  </a:lnTo>
+                  <a:lnTo>
+                    <a:pt x="787847" y="665"/>
+                  </a:lnTo>
+                  <a:lnTo>
+                    <a:pt x="716225" y="605"/>
+                  </a:lnTo>
+                  <a:lnTo>
+                    <a:pt x="644602" y="544"/>
+                  </a:lnTo>
+                  <a:lnTo>
+                    <a:pt x="572980" y="484"/>
+                  </a:lnTo>
+                  <a:lnTo>
+                    <a:pt x="501357" y="423"/>
+                  </a:lnTo>
+                  <a:lnTo>
+                    <a:pt x="429735" y="363"/>
+                  </a:lnTo>
+                  <a:lnTo>
+                    <a:pt x="358112" y="302"/>
+                  </a:lnTo>
+                  <a:lnTo>
+                    <a:pt x="286490" y="242"/>
+                  </a:lnTo>
+                  <a:lnTo>
+                    <a:pt x="214867" y="181"/>
+                  </a:lnTo>
+                  <a:lnTo>
+                    <a:pt x="143245" y="121"/>
+                  </a:lnTo>
+                  <a:lnTo>
+                    <a:pt x="71622" y="60"/>
                   </a:lnTo>
                   <a:lnTo>
                     <a:pt x="0" y="0"/>
@@ -4326,312 +4326,312 @@
           </p:nvSpPr>
           <p:spPr>
             <a:xfrm>
-              <a:off x="1172049" y="4360043"/>
-              <a:ext cx="7090630" cy="503703"/>
+              <a:off x="1172049" y="4365680"/>
+              <a:ext cx="7090630" cy="496468"/>
             </a:xfrm>
             <a:custGeom>
               <a:avLst/>
               <a:pathLst>
-                <a:path w="7090630" h="503703">
+                <a:path w="7090630" h="496468">
                   <a:moveTo>
                     <a:pt x="0" y="0"/>
                   </a:moveTo>
                   <a:lnTo>
-                    <a:pt x="71622" y="6584"/>
-                  </a:lnTo>
-                  <a:lnTo>
-                    <a:pt x="143245" y="13132"/>
-                  </a:lnTo>
-                  <a:lnTo>
-                    <a:pt x="214867" y="19645"/>
-                  </a:lnTo>
-                  <a:lnTo>
-                    <a:pt x="286490" y="26121"/>
-                  </a:lnTo>
-                  <a:lnTo>
-                    <a:pt x="358112" y="32562"/>
-                  </a:lnTo>
-                  <a:lnTo>
-                    <a:pt x="429735" y="38967"/>
-                  </a:lnTo>
-                  <a:lnTo>
-                    <a:pt x="501357" y="45337"/>
-                  </a:lnTo>
-                  <a:lnTo>
-                    <a:pt x="572980" y="51672"/>
-                  </a:lnTo>
-                  <a:lnTo>
-                    <a:pt x="644602" y="57973"/>
-                  </a:lnTo>
-                  <a:lnTo>
-                    <a:pt x="716225" y="64238"/>
-                  </a:lnTo>
-                  <a:lnTo>
-                    <a:pt x="787847" y="70470"/>
-                  </a:lnTo>
-                  <a:lnTo>
-                    <a:pt x="859470" y="76667"/>
-                  </a:lnTo>
-                  <a:lnTo>
-                    <a:pt x="931092" y="82829"/>
-                  </a:lnTo>
-                  <a:lnTo>
-                    <a:pt x="1002715" y="88958"/>
-                  </a:lnTo>
-                  <a:lnTo>
-                    <a:pt x="1074337" y="95054"/>
-                  </a:lnTo>
-                  <a:lnTo>
-                    <a:pt x="1145960" y="101115"/>
-                  </a:lnTo>
-                  <a:lnTo>
-                    <a:pt x="1217582" y="107144"/>
-                  </a:lnTo>
-                  <a:lnTo>
-                    <a:pt x="1289205" y="113139"/>
-                  </a:lnTo>
-                  <a:lnTo>
-                    <a:pt x="1360827" y="119101"/>
-                  </a:lnTo>
-                  <a:lnTo>
-                    <a:pt x="1432450" y="125030"/>
-                  </a:lnTo>
-                  <a:lnTo>
-                    <a:pt x="1504073" y="130927"/>
-                  </a:lnTo>
-                  <a:lnTo>
-                    <a:pt x="1575695" y="136792"/>
-                  </a:lnTo>
-                  <a:lnTo>
-                    <a:pt x="1647318" y="142624"/>
-                  </a:lnTo>
-                  <a:lnTo>
-                    <a:pt x="1718940" y="148424"/>
-                  </a:lnTo>
-                  <a:lnTo>
-                    <a:pt x="1790563" y="154192"/>
-                  </a:lnTo>
-                  <a:lnTo>
-                    <a:pt x="1862185" y="159929"/>
-                  </a:lnTo>
-                  <a:lnTo>
-                    <a:pt x="1933808" y="165633"/>
-                  </a:lnTo>
-                  <a:lnTo>
-                    <a:pt x="2005430" y="171307"/>
-                  </a:lnTo>
-                  <a:lnTo>
-                    <a:pt x="2077053" y="176949"/>
-                  </a:lnTo>
-                  <a:lnTo>
-                    <a:pt x="2148675" y="182561"/>
-                  </a:lnTo>
-                  <a:lnTo>
-                    <a:pt x="2220298" y="188141"/>
-                  </a:lnTo>
-                  <a:lnTo>
-                    <a:pt x="2291920" y="193691"/>
-                  </a:lnTo>
-                  <a:lnTo>
-                    <a:pt x="2363543" y="199210"/>
-                  </a:lnTo>
-                  <a:lnTo>
-                    <a:pt x="2435165" y="204699"/>
-                  </a:lnTo>
-                  <a:lnTo>
-                    <a:pt x="2506788" y="210157"/>
-                  </a:lnTo>
-                  <a:lnTo>
-                    <a:pt x="2578410" y="215586"/>
-                  </a:lnTo>
-                  <a:lnTo>
-                    <a:pt x="2650033" y="220985"/>
-                  </a:lnTo>
-                  <a:lnTo>
-                    <a:pt x="2721655" y="226354"/>
-                  </a:lnTo>
-                  <a:lnTo>
-                    <a:pt x="2793278" y="231694"/>
-                  </a:lnTo>
-                  <a:lnTo>
-                    <a:pt x="2864901" y="237004"/>
-                  </a:lnTo>
-                  <a:lnTo>
-                    <a:pt x="2936523" y="242285"/>
-                  </a:lnTo>
-                  <a:lnTo>
-                    <a:pt x="3008146" y="247537"/>
-                  </a:lnTo>
-                  <a:lnTo>
-                    <a:pt x="3079768" y="252760"/>
-                  </a:lnTo>
-                  <a:lnTo>
-                    <a:pt x="3151391" y="257954"/>
-                  </a:lnTo>
-                  <a:lnTo>
-                    <a:pt x="3223013" y="263120"/>
-                  </a:lnTo>
-                  <a:lnTo>
-                    <a:pt x="3294636" y="268257"/>
-                  </a:lnTo>
-                  <a:lnTo>
-                    <a:pt x="3366258" y="273366"/>
-                  </a:lnTo>
-                  <a:lnTo>
-                    <a:pt x="3437881" y="278447"/>
-                  </a:lnTo>
-                  <a:lnTo>
-                    <a:pt x="3509503" y="283500"/>
-                  </a:lnTo>
-                  <a:lnTo>
-                    <a:pt x="3581126" y="288526"/>
-                  </a:lnTo>
-                  <a:lnTo>
-                    <a:pt x="3652748" y="293523"/>
-                  </a:lnTo>
-                  <a:lnTo>
-                    <a:pt x="3724371" y="298493"/>
-                  </a:lnTo>
-                  <a:lnTo>
-                    <a:pt x="3795993" y="303436"/>
-                  </a:lnTo>
-                  <a:lnTo>
-                    <a:pt x="3867616" y="308352"/>
-                  </a:lnTo>
-                  <a:lnTo>
-                    <a:pt x="3939238" y="313240"/>
-                  </a:lnTo>
-                  <a:lnTo>
-                    <a:pt x="4010861" y="318102"/>
-                  </a:lnTo>
-                  <a:lnTo>
-                    <a:pt x="4082483" y="322937"/>
-                  </a:lnTo>
-                  <a:lnTo>
-                    <a:pt x="4154106" y="327745"/>
-                  </a:lnTo>
-                  <a:lnTo>
-                    <a:pt x="4225729" y="332527"/>
-                  </a:lnTo>
-                  <a:lnTo>
-                    <a:pt x="4297351" y="337283"/>
-                  </a:lnTo>
-                  <a:lnTo>
-                    <a:pt x="4368974" y="342012"/>
-                  </a:lnTo>
-                  <a:lnTo>
-                    <a:pt x="4440596" y="346716"/>
-                  </a:lnTo>
-                  <a:lnTo>
-                    <a:pt x="4512219" y="351394"/>
-                  </a:lnTo>
-                  <a:lnTo>
-                    <a:pt x="4583841" y="356045"/>
-                  </a:lnTo>
-                  <a:lnTo>
-                    <a:pt x="4655464" y="360672"/>
-                  </a:lnTo>
-                  <a:lnTo>
-                    <a:pt x="4727086" y="365273"/>
-                  </a:lnTo>
-                  <a:lnTo>
-                    <a:pt x="4798709" y="369848"/>
-                  </a:lnTo>
-                  <a:lnTo>
-                    <a:pt x="4870331" y="374398"/>
-                  </a:lnTo>
-                  <a:lnTo>
-                    <a:pt x="4941954" y="378924"/>
-                  </a:lnTo>
-                  <a:lnTo>
-                    <a:pt x="5013576" y="383424"/>
-                  </a:lnTo>
-                  <a:lnTo>
-                    <a:pt x="5085199" y="387900"/>
-                  </a:lnTo>
-                  <a:lnTo>
-                    <a:pt x="5156821" y="392351"/>
-                  </a:lnTo>
-                  <a:lnTo>
-                    <a:pt x="5228444" y="396778"/>
-                  </a:lnTo>
-                  <a:lnTo>
-                    <a:pt x="5300066" y="401180"/>
-                  </a:lnTo>
-                  <a:lnTo>
-                    <a:pt x="5371689" y="405558"/>
-                  </a:lnTo>
-                  <a:lnTo>
-                    <a:pt x="5443311" y="409912"/>
-                  </a:lnTo>
-                  <a:lnTo>
-                    <a:pt x="5514934" y="414242"/>
-                  </a:lnTo>
-                  <a:lnTo>
-                    <a:pt x="5586557" y="418548"/>
-                  </a:lnTo>
-                  <a:lnTo>
-                    <a:pt x="5658179" y="422831"/>
-                  </a:lnTo>
-                  <a:lnTo>
-                    <a:pt x="5729802" y="427090"/>
-                  </a:lnTo>
-                  <a:lnTo>
-                    <a:pt x="5801424" y="431325"/>
-                  </a:lnTo>
-                  <a:lnTo>
-                    <a:pt x="5873047" y="435537"/>
-                  </a:lnTo>
-                  <a:lnTo>
-                    <a:pt x="5944669" y="439726"/>
-                  </a:lnTo>
-                  <a:lnTo>
-                    <a:pt x="6016292" y="443892"/>
-                  </a:lnTo>
-                  <a:lnTo>
-                    <a:pt x="6087914" y="448036"/>
-                  </a:lnTo>
-                  <a:lnTo>
-                    <a:pt x="6159537" y="452156"/>
-                  </a:lnTo>
-                  <a:lnTo>
-                    <a:pt x="6231159" y="456254"/>
-                  </a:lnTo>
-                  <a:lnTo>
-                    <a:pt x="6302782" y="460329"/>
-                  </a:lnTo>
-                  <a:lnTo>
-                    <a:pt x="6374404" y="464382"/>
-                  </a:lnTo>
-                  <a:lnTo>
-                    <a:pt x="6446027" y="468412"/>
-                  </a:lnTo>
-                  <a:lnTo>
-                    <a:pt x="6517649" y="472420"/>
-                  </a:lnTo>
-                  <a:lnTo>
-                    <a:pt x="6589272" y="476406"/>
-                  </a:lnTo>
-                  <a:lnTo>
-                    <a:pt x="6660894" y="480371"/>
-                  </a:lnTo>
-                  <a:lnTo>
-                    <a:pt x="6732517" y="484313"/>
-                  </a:lnTo>
-                  <a:lnTo>
-                    <a:pt x="6804139" y="488234"/>
-                  </a:lnTo>
-                  <a:lnTo>
-                    <a:pt x="6875762" y="492133"/>
-                  </a:lnTo>
-                  <a:lnTo>
-                    <a:pt x="6947385" y="496011"/>
-                  </a:lnTo>
-                  <a:lnTo>
-                    <a:pt x="7019007" y="499868"/>
-                  </a:lnTo>
-                  <a:lnTo>
-                    <a:pt x="7090630" y="503703"/>
+                    <a:pt x="71622" y="6469"/>
+                  </a:lnTo>
+                  <a:lnTo>
+                    <a:pt x="143245" y="12903"/>
+                  </a:lnTo>
+                  <a:lnTo>
+                    <a:pt x="214867" y="19303"/>
+                  </a:lnTo>
+                  <a:lnTo>
+                    <a:pt x="286490" y="25667"/>
+                  </a:lnTo>
+                  <a:lnTo>
+                    <a:pt x="358112" y="31997"/>
+                  </a:lnTo>
+                  <a:lnTo>
+                    <a:pt x="429735" y="38293"/>
+                  </a:lnTo>
+                  <a:lnTo>
+                    <a:pt x="501357" y="44555"/>
+                  </a:lnTo>
+                  <a:lnTo>
+                    <a:pt x="572980" y="50782"/>
+                  </a:lnTo>
+                  <a:lnTo>
+                    <a:pt x="644602" y="56976"/>
+                  </a:lnTo>
+                  <a:lnTo>
+                    <a:pt x="716225" y="63136"/>
+                  </a:lnTo>
+                  <a:lnTo>
+                    <a:pt x="787847" y="69263"/>
+                  </a:lnTo>
+                  <a:lnTo>
+                    <a:pt x="859470" y="75356"/>
+                  </a:lnTo>
+                  <a:lnTo>
+                    <a:pt x="931092" y="81416"/>
+                  </a:lnTo>
+                  <a:lnTo>
+                    <a:pt x="1002715" y="87444"/>
+                  </a:lnTo>
+                  <a:lnTo>
+                    <a:pt x="1074337" y="93438"/>
+                  </a:lnTo>
+                  <a:lnTo>
+                    <a:pt x="1145960" y="99400"/>
+                  </a:lnTo>
+                  <a:lnTo>
+                    <a:pt x="1217582" y="105330"/>
+                  </a:lnTo>
+                  <a:lnTo>
+                    <a:pt x="1289205" y="111228"/>
+                  </a:lnTo>
+                  <a:lnTo>
+                    <a:pt x="1360827" y="117093"/>
+                  </a:lnTo>
+                  <a:lnTo>
+                    <a:pt x="1432450" y="122927"/>
+                  </a:lnTo>
+                  <a:lnTo>
+                    <a:pt x="1504073" y="128729"/>
+                  </a:lnTo>
+                  <a:lnTo>
+                    <a:pt x="1575695" y="134500"/>
+                  </a:lnTo>
+                  <a:lnTo>
+                    <a:pt x="1647318" y="140239"/>
+                  </a:lnTo>
+                  <a:lnTo>
+                    <a:pt x="1718940" y="145947"/>
+                  </a:lnTo>
+                  <a:lnTo>
+                    <a:pt x="1790563" y="151624"/>
+                  </a:lnTo>
+                  <a:lnTo>
+                    <a:pt x="1862185" y="157270"/>
+                  </a:lnTo>
+                  <a:lnTo>
+                    <a:pt x="1933808" y="162886"/>
+                  </a:lnTo>
+                  <a:lnTo>
+                    <a:pt x="2005430" y="168471"/>
+                  </a:lnTo>
+                  <a:lnTo>
+                    <a:pt x="2077053" y="174025"/>
+                  </a:lnTo>
+                  <a:lnTo>
+                    <a:pt x="2148675" y="179550"/>
+                  </a:lnTo>
+                  <a:lnTo>
+                    <a:pt x="2220298" y="185045"/>
+                  </a:lnTo>
+                  <a:lnTo>
+                    <a:pt x="2291920" y="190509"/>
+                  </a:lnTo>
+                  <a:lnTo>
+                    <a:pt x="2363543" y="195945"/>
+                  </a:lnTo>
+                  <a:lnTo>
+                    <a:pt x="2435165" y="201350"/>
+                  </a:lnTo>
+                  <a:lnTo>
+                    <a:pt x="2506788" y="206726"/>
+                  </a:lnTo>
+                  <a:lnTo>
+                    <a:pt x="2578410" y="212073"/>
+                  </a:lnTo>
+                  <a:lnTo>
+                    <a:pt x="2650033" y="217391"/>
+                  </a:lnTo>
+                  <a:lnTo>
+                    <a:pt x="2721655" y="222681"/>
+                  </a:lnTo>
+                  <a:lnTo>
+                    <a:pt x="2793278" y="227941"/>
+                  </a:lnTo>
+                  <a:lnTo>
+                    <a:pt x="2864901" y="233173"/>
+                  </a:lnTo>
+                  <a:lnTo>
+                    <a:pt x="2936523" y="238376"/>
+                  </a:lnTo>
+                  <a:lnTo>
+                    <a:pt x="3008146" y="243552"/>
+                  </a:lnTo>
+                  <a:lnTo>
+                    <a:pt x="3079768" y="248699"/>
+                  </a:lnTo>
+                  <a:lnTo>
+                    <a:pt x="3151391" y="253818"/>
+                  </a:lnTo>
+                  <a:lnTo>
+                    <a:pt x="3223013" y="258909"/>
+                  </a:lnTo>
+                  <a:lnTo>
+                    <a:pt x="3294636" y="263973"/>
+                  </a:lnTo>
+                  <a:lnTo>
+                    <a:pt x="3366258" y="269009"/>
+                  </a:lnTo>
+                  <a:lnTo>
+                    <a:pt x="3437881" y="274018"/>
+                  </a:lnTo>
+                  <a:lnTo>
+                    <a:pt x="3509503" y="279000"/>
+                  </a:lnTo>
+                  <a:lnTo>
+                    <a:pt x="3581126" y="283954"/>
+                  </a:lnTo>
+                  <a:lnTo>
+                    <a:pt x="3652748" y="288882"/>
+                  </a:lnTo>
+                  <a:lnTo>
+                    <a:pt x="3724371" y="293783"/>
+                  </a:lnTo>
+                  <a:lnTo>
+                    <a:pt x="3795993" y="298658"/>
+                  </a:lnTo>
+                  <a:lnTo>
+                    <a:pt x="3867616" y="303505"/>
+                  </a:lnTo>
+                  <a:lnTo>
+                    <a:pt x="3939238" y="308327"/>
+                  </a:lnTo>
+                  <a:lnTo>
+                    <a:pt x="4010861" y="313122"/>
+                  </a:lnTo>
+                  <a:lnTo>
+                    <a:pt x="4082483" y="317892"/>
+                  </a:lnTo>
+                  <a:lnTo>
+                    <a:pt x="4154106" y="322635"/>
+                  </a:lnTo>
+                  <a:lnTo>
+                    <a:pt x="4225729" y="327353"/>
+                  </a:lnTo>
+                  <a:lnTo>
+                    <a:pt x="4297351" y="332045"/>
+                  </a:lnTo>
+                  <a:lnTo>
+                    <a:pt x="4368974" y="336712"/>
+                  </a:lnTo>
+                  <a:lnTo>
+                    <a:pt x="4440596" y="341353"/>
+                  </a:lnTo>
+                  <a:lnTo>
+                    <a:pt x="4512219" y="345969"/>
+                  </a:lnTo>
+                  <a:lnTo>
+                    <a:pt x="4583841" y="350560"/>
+                  </a:lnTo>
+                  <a:lnTo>
+                    <a:pt x="4655464" y="355126"/>
+                  </a:lnTo>
+                  <a:lnTo>
+                    <a:pt x="4727086" y="359668"/>
+                  </a:lnTo>
+                  <a:lnTo>
+                    <a:pt x="4798709" y="364184"/>
+                  </a:lnTo>
+                  <a:lnTo>
+                    <a:pt x="4870331" y="368677"/>
+                  </a:lnTo>
+                  <a:lnTo>
+                    <a:pt x="4941954" y="373144"/>
+                  </a:lnTo>
+                  <a:lnTo>
+                    <a:pt x="5013576" y="377588"/>
+                  </a:lnTo>
+                  <a:lnTo>
+                    <a:pt x="5085199" y="382007"/>
+                  </a:lnTo>
+                  <a:lnTo>
+                    <a:pt x="5156821" y="386403"/>
+                  </a:lnTo>
+                  <a:lnTo>
+                    <a:pt x="5228444" y="390774"/>
+                  </a:lnTo>
+                  <a:lnTo>
+                    <a:pt x="5300066" y="395122"/>
+                  </a:lnTo>
+                  <a:lnTo>
+                    <a:pt x="5371689" y="399446"/>
+                  </a:lnTo>
+                  <a:lnTo>
+                    <a:pt x="5443311" y="403747"/>
+                  </a:lnTo>
+                  <a:lnTo>
+                    <a:pt x="5514934" y="408024"/>
+                  </a:lnTo>
+                  <a:lnTo>
+                    <a:pt x="5586557" y="412278"/>
+                  </a:lnTo>
+                  <a:lnTo>
+                    <a:pt x="5658179" y="416509"/>
+                  </a:lnTo>
+                  <a:lnTo>
+                    <a:pt x="5729802" y="420717"/>
+                  </a:lnTo>
+                  <a:lnTo>
+                    <a:pt x="5801424" y="424903"/>
+                  </a:lnTo>
+                  <a:lnTo>
+                    <a:pt x="5873047" y="429065"/>
+                  </a:lnTo>
+                  <a:lnTo>
+                    <a:pt x="5944669" y="433205"/>
+                  </a:lnTo>
+                  <a:lnTo>
+                    <a:pt x="6016292" y="437322"/>
+                  </a:lnTo>
+                  <a:lnTo>
+                    <a:pt x="6087914" y="441418"/>
+                  </a:lnTo>
+                  <a:lnTo>
+                    <a:pt x="6159537" y="445490"/>
+                  </a:lnTo>
+                  <a:lnTo>
+                    <a:pt x="6231159" y="449541"/>
+                  </a:lnTo>
+                  <a:lnTo>
+                    <a:pt x="6302782" y="453570"/>
+                  </a:lnTo>
+                  <a:lnTo>
+                    <a:pt x="6374404" y="457577"/>
+                  </a:lnTo>
+                  <a:lnTo>
+                    <a:pt x="6446027" y="461562"/>
+                  </a:lnTo>
+                  <a:lnTo>
+                    <a:pt x="6517649" y="465525"/>
+                  </a:lnTo>
+                  <a:lnTo>
+                    <a:pt x="6589272" y="469467"/>
+                  </a:lnTo>
+                  <a:lnTo>
+                    <a:pt x="6660894" y="473388"/>
+                  </a:lnTo>
+                  <a:lnTo>
+                    <a:pt x="6732517" y="477287"/>
+                  </a:lnTo>
+                  <a:lnTo>
+                    <a:pt x="6804139" y="481165"/>
+                  </a:lnTo>
+                  <a:lnTo>
+                    <a:pt x="6875762" y="485022"/>
+                  </a:lnTo>
+                  <a:lnTo>
+                    <a:pt x="6947385" y="488858"/>
+                  </a:lnTo>
+                  <a:lnTo>
+                    <a:pt x="7019007" y="492673"/>
+                  </a:lnTo>
+                  <a:lnTo>
+                    <a:pt x="7090630" y="496468"/>
                   </a:lnTo>
                 </a:path>
               </a:pathLst>
@@ -5371,7 +5371,7 @@
                   <a:latin typeface="Helvetica"/>
                   <a:cs typeface="Helvetica"/>
                 </a:rPr>
-                <a:t>subHR per 10 mL/min decline: 1.07 (1.00-1.14), p_Bonf = 0.264 (n = 6)  |  per IQR decline (Δ = 23.3): 1.17 (1.00-1.36)  |  IQR: [-12.8, 10.5]</a:t>
+                <a:t>subHR per 10 mL/min decline: 1.07 (1.00-1.14), p_Bonf = 0.282 (n = 6)  |  per IQR decline (Δ = 23.3): 1.17 (1.00-1.36)  |  IQR: [-12.8, 10.5]</a:t>
               </a:r>
             </a:p>
           </p:txBody>
